--- a/slides.pptx
+++ b/slides.pptx
@@ -28,6 +28,10 @@
     <p:sldId id="276" r:id="rId28"/>
     <p:sldId id="277" r:id="rId29"/>
     <p:sldId id="278" r:id="rId30"/>
+    <p:sldId id="279" r:id="rId31"/>
+    <p:sldId id="280" r:id="rId32"/>
+    <p:sldId id="281" r:id="rId33"/>
+    <p:sldId id="282" r:id="rId34"/>
   </p:sldIdLst>
   <p:sldSz cx="12191695" cy="6858000" type="screen4x3"/>
   <p:notesSz cx="6858000" cy="9144000"/>
@@ -14664,6 +14668,2543 @@
 </p:sld>
 </file>
 
+<file path=ppt/slides/slide24.xml><?xml version="1.0" encoding="utf-8"?>
+<p:sld xmlns:a="http://schemas.openxmlformats.org/drawingml/2006/main" xmlns:p="http://schemas.openxmlformats.org/presentationml/2006/main" xmlns:r="http://schemas.openxmlformats.org/officeDocument/2006/relationships">
+  <p:cSld>
+    <p:spTree>
+      <p:nvGrpSpPr>
+        <p:cNvPr id="1" name=""/>
+        <p:cNvGrpSpPr/>
+        <p:nvPr/>
+      </p:nvGrpSpPr>
+      <p:grpSpPr/>
+      <p:sp>
+        <p:nvSpPr>
+          <p:cNvPr id="2" name="Rectangle 1"/>
+          <p:cNvSpPr/>
+          <p:nvPr/>
+        </p:nvSpPr>
+        <p:spPr>
+          <a:xfrm>
+            <a:off x="0" y="0"/>
+            <a:ext cx="12191695" cy="6858000"/>
+          </a:xfrm>
+          <a:prstGeom prst="rect">
+            <a:avLst/>
+          </a:prstGeom>
+          <a:solidFill>
+            <a:srgbClr val="FAF7F2"/>
+          </a:solidFill>
+          <a:ln>
+            <a:noFill/>
+          </a:ln>
+        </p:spPr>
+        <p:style>
+          <a:lnRef idx="1">
+            <a:schemeClr val="accent1"/>
+          </a:lnRef>
+          <a:fillRef idx="3">
+            <a:schemeClr val="accent1"/>
+          </a:fillRef>
+          <a:effectRef idx="2">
+            <a:schemeClr val="accent1"/>
+          </a:effectRef>
+          <a:fontRef idx="minor">
+            <a:schemeClr val="lt1"/>
+          </a:fontRef>
+        </p:style>
+        <p:txBody>
+          <a:bodyPr rtlCol="0" anchor="ctr"/>
+          <a:lstStyle/>
+          <a:p>
+            <a:pPr algn="ctr"/>
+          </a:p>
+        </p:txBody>
+      </p:sp>
+      <p:sp>
+        <p:nvSpPr>
+          <p:cNvPr id="3" name="Rectangle 2"/>
+          <p:cNvSpPr/>
+          <p:nvPr/>
+        </p:nvSpPr>
+        <p:spPr>
+          <a:xfrm>
+            <a:off x="0" y="0"/>
+            <a:ext cx="12191695" cy="109728"/>
+          </a:xfrm>
+          <a:prstGeom prst="rect">
+            <a:avLst/>
+          </a:prstGeom>
+          <a:solidFill>
+            <a:srgbClr val="1F4435"/>
+          </a:solidFill>
+          <a:ln>
+            <a:noFill/>
+          </a:ln>
+        </p:spPr>
+        <p:style>
+          <a:lnRef idx="1">
+            <a:schemeClr val="accent1"/>
+          </a:lnRef>
+          <a:fillRef idx="3">
+            <a:schemeClr val="accent1"/>
+          </a:fillRef>
+          <a:effectRef idx="2">
+            <a:schemeClr val="accent1"/>
+          </a:effectRef>
+          <a:fontRef idx="minor">
+            <a:schemeClr val="lt1"/>
+          </a:fontRef>
+        </p:style>
+        <p:txBody>
+          <a:bodyPr rtlCol="0" anchor="ctr"/>
+          <a:lstStyle/>
+          <a:p>
+            <a:pPr algn="ctr"/>
+          </a:p>
+        </p:txBody>
+      </p:sp>
+      <p:sp>
+        <p:nvSpPr>
+          <p:cNvPr id="4" name="Rectangle 3"/>
+          <p:cNvSpPr/>
+          <p:nvPr/>
+        </p:nvSpPr>
+        <p:spPr>
+          <a:xfrm>
+            <a:off x="0" y="109728"/>
+            <a:ext cx="4114800" cy="36576"/>
+          </a:xfrm>
+          <a:prstGeom prst="rect">
+            <a:avLst/>
+          </a:prstGeom>
+          <a:solidFill>
+            <a:srgbClr val="C25E2E"/>
+          </a:solidFill>
+          <a:ln>
+            <a:noFill/>
+          </a:ln>
+        </p:spPr>
+        <p:style>
+          <a:lnRef idx="1">
+            <a:schemeClr val="accent1"/>
+          </a:lnRef>
+          <a:fillRef idx="3">
+            <a:schemeClr val="accent1"/>
+          </a:fillRef>
+          <a:effectRef idx="2">
+            <a:schemeClr val="accent1"/>
+          </a:effectRef>
+          <a:fontRef idx="minor">
+            <a:schemeClr val="lt1"/>
+          </a:fontRef>
+        </p:style>
+        <p:txBody>
+          <a:bodyPr rtlCol="0" anchor="ctr"/>
+          <a:lstStyle/>
+          <a:p>
+            <a:pPr algn="ctr"/>
+          </a:p>
+        </p:txBody>
+      </p:sp>
+      <p:sp>
+        <p:nvSpPr>
+          <p:cNvPr id="5" name="TextBox 4"/>
+          <p:cNvSpPr txBox="1"/>
+          <p:nvPr/>
+        </p:nvSpPr>
+        <p:spPr>
+          <a:xfrm>
+            <a:off x="731520" y="320040"/>
+            <a:ext cx="7772400" cy="320040"/>
+          </a:xfrm>
+          <a:prstGeom prst="rect">
+            <a:avLst/>
+          </a:prstGeom>
+          <a:noFill/>
+        </p:spPr>
+        <p:txBody>
+          <a:bodyPr wrap="none" lIns="0" tIns="0" rIns="0" bIns="0">
+            <a:spAutoFit/>
+          </a:bodyPr>
+          <a:lstStyle/>
+          <a:p>
+            <a:pPr>
+              <a:defRPr sz="1300" b="1">
+                <a:solidFill>
+                  <a:srgbClr val="C25E2E"/>
+                </a:solidFill>
+                <a:latin typeface="微軟正黑體"/>
+              </a:defRPr>
+            </a:pPr>
+            <a:r>
+              <a:t>🌿 ANTIGRAVITY 研習手冊  |  第七單元：高階實戰特輯</a:t>
+            </a:r>
+          </a:p>
+        </p:txBody>
+      </p:sp>
+      <p:sp>
+        <p:nvSpPr>
+          <p:cNvPr id="6" name="TextBox 5"/>
+          <p:cNvSpPr txBox="1"/>
+          <p:nvPr/>
+        </p:nvSpPr>
+        <p:spPr>
+          <a:xfrm>
+            <a:off x="9326880" y="320040"/>
+            <a:ext cx="2103120" cy="320040"/>
+          </a:xfrm>
+          <a:prstGeom prst="rect">
+            <a:avLst/>
+          </a:prstGeom>
+          <a:noFill/>
+        </p:spPr>
+        <p:txBody>
+          <a:bodyPr wrap="none" lIns="0" tIns="0" rIns="0" bIns="0">
+            <a:spAutoFit/>
+          </a:bodyPr>
+          <a:lstStyle/>
+          <a:p>
+            <a:pPr algn="r">
+              <a:defRPr sz="1300">
+                <a:solidFill>
+                  <a:srgbClr val="6C757D"/>
+                </a:solidFill>
+                <a:latin typeface="微軟正黑體"/>
+              </a:defRPr>
+            </a:pPr>
+            <a:r>
+              <a:t>第 24 / 27 頁</a:t>
+            </a:r>
+          </a:p>
+        </p:txBody>
+      </p:sp>
+      <p:sp>
+        <p:nvSpPr>
+          <p:cNvPr id="7" name="TextBox 6"/>
+          <p:cNvSpPr txBox="1"/>
+          <p:nvPr/>
+        </p:nvSpPr>
+        <p:spPr>
+          <a:xfrm>
+            <a:off x="731520" y="658368"/>
+            <a:ext cx="10698480" cy="685800"/>
+          </a:xfrm>
+          <a:prstGeom prst="rect">
+            <a:avLst/>
+          </a:prstGeom>
+          <a:noFill/>
+        </p:spPr>
+        <p:txBody>
+          <a:bodyPr wrap="square" lIns="0" tIns="0" rIns="0" bIns="0">
+            <a:spAutoFit/>
+          </a:bodyPr>
+          <a:lstStyle/>
+          <a:p>
+            <a:pPr>
+              <a:defRPr sz="2800" b="1">
+                <a:solidFill>
+                  <a:srgbClr val="1F4435"/>
+                </a:solidFill>
+                <a:latin typeface="微軟正黑體"/>
+              </a:defRPr>
+            </a:pPr>
+            <a:r>
+              <a:t>【高階實戰案例】虛擬電子儀表 ✕ 丙級試題二模擬系統</a:t>
+            </a:r>
+          </a:p>
+        </p:txBody>
+      </p:sp>
+      <p:sp>
+        <p:nvSpPr>
+          <p:cNvPr id="8" name="Rounded Rectangle 7"/>
+          <p:cNvSpPr/>
+          <p:nvPr/>
+        </p:nvSpPr>
+        <p:spPr>
+          <a:xfrm>
+            <a:off x="731520" y="1508760"/>
+            <a:ext cx="5120640" cy="4846320"/>
+          </a:xfrm>
+          <a:prstGeom prst="roundRect">
+            <a:avLst/>
+          </a:prstGeom>
+          <a:solidFill>
+            <a:srgbClr val="FFFFFF"/>
+          </a:solidFill>
+          <a:ln w="19050">
+            <a:solidFill>
+              <a:srgbClr val="E6E0D6"/>
+            </a:solidFill>
+          </a:ln>
+        </p:spPr>
+        <p:style>
+          <a:lnRef idx="1">
+            <a:schemeClr val="accent1"/>
+          </a:lnRef>
+          <a:fillRef idx="3">
+            <a:schemeClr val="accent1"/>
+          </a:fillRef>
+          <a:effectRef idx="2">
+            <a:schemeClr val="accent1"/>
+          </a:effectRef>
+          <a:fontRef idx="minor">
+            <a:schemeClr val="lt1"/>
+          </a:fontRef>
+        </p:style>
+        <p:txBody>
+          <a:bodyPr rtlCol="0" anchor="ctr"/>
+          <a:lstStyle/>
+          <a:p>
+            <a:pPr algn="ctr"/>
+          </a:p>
+        </p:txBody>
+      </p:sp>
+      <p:sp>
+        <p:nvSpPr>
+          <p:cNvPr id="9" name="TextBox 8"/>
+          <p:cNvSpPr txBox="1"/>
+          <p:nvPr/>
+        </p:nvSpPr>
+        <p:spPr>
+          <a:xfrm>
+            <a:off x="960120" y="1691640"/>
+            <a:ext cx="4663440" cy="4480560"/>
+          </a:xfrm>
+          <a:prstGeom prst="rect">
+            <a:avLst/>
+          </a:prstGeom>
+          <a:noFill/>
+        </p:spPr>
+        <p:txBody>
+          <a:bodyPr wrap="square">
+            <a:spAutoFit/>
+          </a:bodyPr>
+          <a:lstStyle/>
+          <a:p>
+            <a:pPr>
+              <a:spcAft>
+                <a:spcPts val="1000"/>
+              </a:spcAft>
+              <a:defRPr sz="1700" b="1">
+                <a:solidFill>
+                  <a:srgbClr val="1F4435"/>
+                </a:solidFill>
+                <a:latin typeface="微軟正黑體"/>
+              </a:defRPr>
+            </a:pPr>
+            <a:r>
+              <a:t>🎯 純前端單檔教學模擬器 (instrument.html)</a:t>
+            </a:r>
+          </a:p>
+          <a:p>
+            <a:pPr>
+              <a:spcAft>
+                <a:spcPts val="800"/>
+              </a:spcAft>
+              <a:defRPr sz="1300">
+                <a:solidFill>
+                  <a:srgbClr val="2B2D42"/>
+                </a:solidFill>
+                <a:latin typeface="微軟正黑體"/>
+              </a:defRPr>
+            </a:pPr>
+            <a:r>
+              <a:t>⚡ 整合 GDS-2102E 示波器 ＆ MFG-2110 任意波形信號產生器</a:t>
+            </a:r>
+          </a:p>
+          <a:p>
+            <a:pPr>
+              <a:spcAft>
+                <a:spcPts val="800"/>
+              </a:spcAft>
+              <a:defRPr sz="1300">
+                <a:solidFill>
+                  <a:srgbClr val="2B2D42"/>
+                </a:solidFill>
+                <a:latin typeface="微軟正黑體"/>
+              </a:defRPr>
+            </a:pPr>
+            <a:r>
+              <a:t>🔌 一鍵連線測試：自動接線、通電、開輸出並 Autoset 展開最佳波形</a:t>
+            </a:r>
+          </a:p>
+          <a:p>
+            <a:pPr>
+              <a:spcAft>
+                <a:spcPts val="800"/>
+              </a:spcAft>
+              <a:defRPr sz="1300">
+                <a:solidFill>
+                  <a:srgbClr val="2B2D42"/>
+                </a:solidFill>
+                <a:latin typeface="微軟正黑體"/>
+              </a:defRPr>
+            </a:pPr>
+            <a:r>
+              <a:t>🔒 靜態觸發鎖定：徹底解決高頻正弦波滾動問題，穩定清晰</a:t>
+            </a:r>
+          </a:p>
+          <a:p>
+            <a:pPr>
+              <a:spcAft>
+                <a:spcPts val="800"/>
+              </a:spcAft>
+              <a:defRPr sz="1300">
+                <a:solidFill>
+                  <a:srgbClr val="2B2D42"/>
+                </a:solidFill>
+                <a:latin typeface="微軟正黑體"/>
+              </a:defRPr>
+            </a:pPr>
+            <a:r>
+              <a:t>🎬 10 步驟全自動教學導航：每 3.5s 計時自動模擬實機按鍵動作</a:t>
+            </a:r>
+          </a:p>
+          <a:p>
+            <a:pPr>
+              <a:spcAft>
+                <a:spcPts val="800"/>
+              </a:spcAft>
+              <a:defRPr sz="1300">
+                <a:solidFill>
+                  <a:srgbClr val="2B2D42"/>
+                </a:solidFill>
+                <a:latin typeface="微軟正黑體"/>
+              </a:defRPr>
+            </a:pPr>
+            <a:r>
+              <a:t>📝 台灣工業電子丙級術科試題二：12 題組電路模擬與自動評分扣分</a:t>
+            </a:r>
+          </a:p>
+          <a:p>
+            <a:pPr>
+              <a:spcAft>
+                <a:spcPts val="800"/>
+              </a:spcAft>
+              <a:defRPr sz="1300">
+                <a:solidFill>
+                  <a:srgbClr val="2B2D42"/>
+                </a:solidFill>
+                <a:latin typeface="微軟正黑體"/>
+              </a:defRPr>
+            </a:pPr>
+            <a:r>
+              <a:t>💡 零外部相依：純 SVG 手繪面板 ✕ Canvas 繪圖，完全離線可用</a:t>
+            </a:r>
+          </a:p>
+        </p:txBody>
+      </p:sp>
+      <p:sp>
+        <p:nvSpPr>
+          <p:cNvPr id="10" name="Rounded Rectangle 9"/>
+          <p:cNvSpPr/>
+          <p:nvPr/>
+        </p:nvSpPr>
+        <p:spPr>
+          <a:xfrm>
+            <a:off x="6035040" y="1508760"/>
+            <a:ext cx="5394960" cy="4846320"/>
+          </a:xfrm>
+          <a:prstGeom prst="roundRect">
+            <a:avLst/>
+          </a:prstGeom>
+          <a:solidFill>
+            <a:srgbClr val="FFFFFF"/>
+          </a:solidFill>
+          <a:ln w="19050">
+            <a:solidFill>
+              <a:srgbClr val="E6E0D6"/>
+            </a:solidFill>
+          </a:ln>
+        </p:spPr>
+        <p:style>
+          <a:lnRef idx="1">
+            <a:schemeClr val="accent1"/>
+          </a:lnRef>
+          <a:fillRef idx="3">
+            <a:schemeClr val="accent1"/>
+          </a:fillRef>
+          <a:effectRef idx="2">
+            <a:schemeClr val="accent1"/>
+          </a:effectRef>
+          <a:fontRef idx="minor">
+            <a:schemeClr val="lt1"/>
+          </a:fontRef>
+        </p:style>
+        <p:txBody>
+          <a:bodyPr rtlCol="0" anchor="ctr"/>
+          <a:lstStyle/>
+          <a:p>
+            <a:pPr algn="ctr"/>
+          </a:p>
+        </p:txBody>
+      </p:sp>
+      <p:pic>
+        <p:nvPicPr>
+          <p:cNvPr id="11" name="Picture 10" descr="media_0.png"/>
+          <p:cNvPicPr>
+            <a:picLocks noChangeAspect="1"/>
+          </p:cNvPicPr>
+          <p:nvPr/>
+        </p:nvPicPr>
+        <p:blipFill>
+          <a:blip r:embed="rId2"/>
+          <a:stretch>
+            <a:fillRect/>
+          </a:stretch>
+        </p:blipFill>
+        <p:spPr>
+          <a:xfrm>
+            <a:off x="6172200" y="1691640"/>
+            <a:ext cx="5120640" cy="2370963"/>
+          </a:xfrm>
+          <a:prstGeom prst="rect">
+            <a:avLst/>
+          </a:prstGeom>
+        </p:spPr>
+      </p:pic>
+      <p:sp>
+        <p:nvSpPr>
+          <p:cNvPr id="12" name="TextBox 11"/>
+          <p:cNvSpPr txBox="1"/>
+          <p:nvPr/>
+        </p:nvSpPr>
+        <p:spPr>
+          <a:xfrm>
+            <a:off x="6172200" y="5303520"/>
+            <a:ext cx="5120640" cy="822960"/>
+          </a:xfrm>
+          <a:prstGeom prst="rect">
+            <a:avLst/>
+          </a:prstGeom>
+          <a:noFill/>
+        </p:spPr>
+        <p:txBody>
+          <a:bodyPr wrap="square">
+            <a:spAutoFit/>
+          </a:bodyPr>
+          <a:lstStyle/>
+          <a:p>
+            <a:pPr>
+              <a:defRPr sz="1100" b="1">
+                <a:solidFill>
+                  <a:srgbClr val="C25E2E"/>
+                </a:solidFill>
+                <a:latin typeface="微軟正黑體"/>
+              </a:defRPr>
+            </a:pPr>
+            <a:r>
+              <a:t>▲ 實機操作：信號產生器直連示波器 CH1，鎖定 Trig'd 靜態波形與 18px 黃色大字體 Measure 讀數</a:t>
+            </a:r>
+          </a:p>
+        </p:txBody>
+      </p:sp>
+    </p:spTree>
+  </p:cSld>
+  <p:clrMapOvr>
+    <a:masterClrMapping/>
+  </p:clrMapOvr>
+  <p:transition spd="med">
+    <p:fade/>
+  </p:transition>
+</p:sld>
+</file>
+
+<file path=ppt/slides/slide25.xml><?xml version="1.0" encoding="utf-8"?>
+<p:sld xmlns:a="http://schemas.openxmlformats.org/drawingml/2006/main" xmlns:p="http://schemas.openxmlformats.org/presentationml/2006/main" xmlns:r="http://schemas.openxmlformats.org/officeDocument/2006/relationships">
+  <p:cSld>
+    <p:spTree>
+      <p:nvGrpSpPr>
+        <p:cNvPr id="1" name=""/>
+        <p:cNvGrpSpPr/>
+        <p:nvPr/>
+      </p:nvGrpSpPr>
+      <p:grpSpPr/>
+      <p:sp>
+        <p:nvSpPr>
+          <p:cNvPr id="2" name="Rectangle 1"/>
+          <p:cNvSpPr/>
+          <p:nvPr/>
+        </p:nvSpPr>
+        <p:spPr>
+          <a:xfrm>
+            <a:off x="0" y="0"/>
+            <a:ext cx="12191695" cy="6858000"/>
+          </a:xfrm>
+          <a:prstGeom prst="rect">
+            <a:avLst/>
+          </a:prstGeom>
+          <a:solidFill>
+            <a:srgbClr val="FAF7F2"/>
+          </a:solidFill>
+          <a:ln>
+            <a:noFill/>
+          </a:ln>
+        </p:spPr>
+        <p:style>
+          <a:lnRef idx="1">
+            <a:schemeClr val="accent1"/>
+          </a:lnRef>
+          <a:fillRef idx="3">
+            <a:schemeClr val="accent1"/>
+          </a:fillRef>
+          <a:effectRef idx="2">
+            <a:schemeClr val="accent1"/>
+          </a:effectRef>
+          <a:fontRef idx="minor">
+            <a:schemeClr val="lt1"/>
+          </a:fontRef>
+        </p:style>
+        <p:txBody>
+          <a:bodyPr rtlCol="0" anchor="ctr"/>
+          <a:lstStyle/>
+          <a:p>
+            <a:pPr algn="ctr"/>
+          </a:p>
+        </p:txBody>
+      </p:sp>
+      <p:sp>
+        <p:nvSpPr>
+          <p:cNvPr id="3" name="Rectangle 2"/>
+          <p:cNvSpPr/>
+          <p:nvPr/>
+        </p:nvSpPr>
+        <p:spPr>
+          <a:xfrm>
+            <a:off x="0" y="0"/>
+            <a:ext cx="12191695" cy="109728"/>
+          </a:xfrm>
+          <a:prstGeom prst="rect">
+            <a:avLst/>
+          </a:prstGeom>
+          <a:solidFill>
+            <a:srgbClr val="1F4435"/>
+          </a:solidFill>
+          <a:ln>
+            <a:noFill/>
+          </a:ln>
+        </p:spPr>
+        <p:style>
+          <a:lnRef idx="1">
+            <a:schemeClr val="accent1"/>
+          </a:lnRef>
+          <a:fillRef idx="3">
+            <a:schemeClr val="accent1"/>
+          </a:fillRef>
+          <a:effectRef idx="2">
+            <a:schemeClr val="accent1"/>
+          </a:effectRef>
+          <a:fontRef idx="minor">
+            <a:schemeClr val="lt1"/>
+          </a:fontRef>
+        </p:style>
+        <p:txBody>
+          <a:bodyPr rtlCol="0" anchor="ctr"/>
+          <a:lstStyle/>
+          <a:p>
+            <a:pPr algn="ctr"/>
+          </a:p>
+        </p:txBody>
+      </p:sp>
+      <p:sp>
+        <p:nvSpPr>
+          <p:cNvPr id="4" name="Rectangle 3"/>
+          <p:cNvSpPr/>
+          <p:nvPr/>
+        </p:nvSpPr>
+        <p:spPr>
+          <a:xfrm>
+            <a:off x="0" y="109728"/>
+            <a:ext cx="4114800" cy="36576"/>
+          </a:xfrm>
+          <a:prstGeom prst="rect">
+            <a:avLst/>
+          </a:prstGeom>
+          <a:solidFill>
+            <a:srgbClr val="C25E2E"/>
+          </a:solidFill>
+          <a:ln>
+            <a:noFill/>
+          </a:ln>
+        </p:spPr>
+        <p:style>
+          <a:lnRef idx="1">
+            <a:schemeClr val="accent1"/>
+          </a:lnRef>
+          <a:fillRef idx="3">
+            <a:schemeClr val="accent1"/>
+          </a:fillRef>
+          <a:effectRef idx="2">
+            <a:schemeClr val="accent1"/>
+          </a:effectRef>
+          <a:fontRef idx="minor">
+            <a:schemeClr val="lt1"/>
+          </a:fontRef>
+        </p:style>
+        <p:txBody>
+          <a:bodyPr rtlCol="0" anchor="ctr"/>
+          <a:lstStyle/>
+          <a:p>
+            <a:pPr algn="ctr"/>
+          </a:p>
+        </p:txBody>
+      </p:sp>
+      <p:sp>
+        <p:nvSpPr>
+          <p:cNvPr id="5" name="TextBox 4"/>
+          <p:cNvSpPr txBox="1"/>
+          <p:nvPr/>
+        </p:nvSpPr>
+        <p:spPr>
+          <a:xfrm>
+            <a:off x="731520" y="320040"/>
+            <a:ext cx="7772400" cy="320040"/>
+          </a:xfrm>
+          <a:prstGeom prst="rect">
+            <a:avLst/>
+          </a:prstGeom>
+          <a:noFill/>
+        </p:spPr>
+        <p:txBody>
+          <a:bodyPr wrap="none" lIns="0" tIns="0" rIns="0" bIns="0">
+            <a:spAutoFit/>
+          </a:bodyPr>
+          <a:lstStyle/>
+          <a:p>
+            <a:pPr>
+              <a:defRPr sz="1300" b="1">
+                <a:solidFill>
+                  <a:srgbClr val="C25E2E"/>
+                </a:solidFill>
+                <a:latin typeface="微軟正黑體"/>
+              </a:defRPr>
+            </a:pPr>
+            <a:r>
+              <a:t>🌿 ANTIGRAVITY 研習手冊  |  第七單元：高階實戰特輯</a:t>
+            </a:r>
+          </a:p>
+        </p:txBody>
+      </p:sp>
+      <p:sp>
+        <p:nvSpPr>
+          <p:cNvPr id="6" name="TextBox 5"/>
+          <p:cNvSpPr txBox="1"/>
+          <p:nvPr/>
+        </p:nvSpPr>
+        <p:spPr>
+          <a:xfrm>
+            <a:off x="9326880" y="320040"/>
+            <a:ext cx="2103120" cy="320040"/>
+          </a:xfrm>
+          <a:prstGeom prst="rect">
+            <a:avLst/>
+          </a:prstGeom>
+          <a:noFill/>
+        </p:spPr>
+        <p:txBody>
+          <a:bodyPr wrap="none" lIns="0" tIns="0" rIns="0" bIns="0">
+            <a:spAutoFit/>
+          </a:bodyPr>
+          <a:lstStyle/>
+          <a:p>
+            <a:pPr algn="r">
+              <a:defRPr sz="1300">
+                <a:solidFill>
+                  <a:srgbClr val="6C757D"/>
+                </a:solidFill>
+                <a:latin typeface="微軟正黑體"/>
+              </a:defRPr>
+            </a:pPr>
+            <a:r>
+              <a:t>第 25 / 27 頁</a:t>
+            </a:r>
+          </a:p>
+        </p:txBody>
+      </p:sp>
+      <p:sp>
+        <p:nvSpPr>
+          <p:cNvPr id="7" name="TextBox 6"/>
+          <p:cNvSpPr txBox="1"/>
+          <p:nvPr/>
+        </p:nvSpPr>
+        <p:spPr>
+          <a:xfrm>
+            <a:off x="731520" y="658368"/>
+            <a:ext cx="10698480" cy="685800"/>
+          </a:xfrm>
+          <a:prstGeom prst="rect">
+            <a:avLst/>
+          </a:prstGeom>
+          <a:noFill/>
+        </p:spPr>
+        <p:txBody>
+          <a:bodyPr wrap="square" lIns="0" tIns="0" rIns="0" bIns="0">
+            <a:spAutoFit/>
+          </a:bodyPr>
+          <a:lstStyle/>
+          <a:p>
+            <a:pPr>
+              <a:defRPr sz="2800" b="1">
+                <a:solidFill>
+                  <a:srgbClr val="1F4435"/>
+                </a:solidFill>
+                <a:latin typeface="微軟正黑體"/>
+              </a:defRPr>
+            </a:pPr>
+            <a:r>
+              <a:t>工程級教具的底層靈魂：依據三大官方資料手冊</a:t>
+            </a:r>
+          </a:p>
+        </p:txBody>
+      </p:sp>
+      <p:sp>
+        <p:nvSpPr>
+          <p:cNvPr id="8" name="Rounded Rectangle 7"/>
+          <p:cNvSpPr/>
+          <p:nvPr/>
+        </p:nvSpPr>
+        <p:spPr>
+          <a:xfrm>
+            <a:off x="731520" y="1508760"/>
+            <a:ext cx="5120640" cy="4846320"/>
+          </a:xfrm>
+          <a:prstGeom prst="roundRect">
+            <a:avLst/>
+          </a:prstGeom>
+          <a:solidFill>
+            <a:srgbClr val="FFFFFF"/>
+          </a:solidFill>
+          <a:ln w="19050">
+            <a:solidFill>
+              <a:srgbClr val="E6E0D6"/>
+            </a:solidFill>
+          </a:ln>
+        </p:spPr>
+        <p:style>
+          <a:lnRef idx="1">
+            <a:schemeClr val="accent1"/>
+          </a:lnRef>
+          <a:fillRef idx="3">
+            <a:schemeClr val="accent1"/>
+          </a:fillRef>
+          <a:effectRef idx="2">
+            <a:schemeClr val="accent1"/>
+          </a:effectRef>
+          <a:fontRef idx="minor">
+            <a:schemeClr val="lt1"/>
+          </a:fontRef>
+        </p:style>
+        <p:txBody>
+          <a:bodyPr rtlCol="0" anchor="ctr"/>
+          <a:lstStyle/>
+          <a:p>
+            <a:pPr algn="ctr"/>
+          </a:p>
+        </p:txBody>
+      </p:sp>
+      <p:sp>
+        <p:nvSpPr>
+          <p:cNvPr id="9" name="TextBox 8"/>
+          <p:cNvSpPr txBox="1"/>
+          <p:nvPr/>
+        </p:nvSpPr>
+        <p:spPr>
+          <a:xfrm>
+            <a:off x="960120" y="1691640"/>
+            <a:ext cx="4663440" cy="4480560"/>
+          </a:xfrm>
+          <a:prstGeom prst="rect">
+            <a:avLst/>
+          </a:prstGeom>
+          <a:noFill/>
+        </p:spPr>
+        <p:txBody>
+          <a:bodyPr wrap="square">
+            <a:spAutoFit/>
+          </a:bodyPr>
+          <a:lstStyle/>
+          <a:p>
+            <a:pPr>
+              <a:spcAft>
+                <a:spcPts val="1000"/>
+              </a:spcAft>
+              <a:defRPr sz="1700" b="1">
+                <a:solidFill>
+                  <a:srgbClr val="1F4435"/>
+                </a:solidFill>
+                <a:latin typeface="微軟正黑體"/>
+              </a:defRPr>
+            </a:pPr>
+            <a:r>
+              <a:t>📚 三大官方標準與物理模型</a:t>
+            </a:r>
+          </a:p>
+          <a:p>
+            <a:pPr>
+              <a:defRPr sz="1300" b="1">
+                <a:solidFill>
+                  <a:srgbClr val="C25E2E"/>
+                </a:solidFill>
+                <a:latin typeface="微軟正黑體"/>
+              </a:defRPr>
+            </a:pPr>
+            <a:r>
+              <a:t>🔹 1. GW INSTEK GDS-2000E 使用手冊</a:t>
+            </a:r>
+          </a:p>
+          <a:p>
+            <a:pPr>
+              <a:spcAft>
+                <a:spcPts val="600"/>
+              </a:spcAft>
+              <a:defRPr sz="1100">
+                <a:solidFill>
+                  <a:srgbClr val="2B2D42"/>
+                </a:solidFill>
+                <a:latin typeface="微軟正黑體"/>
+              </a:defRPr>
+            </a:pPr>
+            <a:r>
+              <a:t>   垂直 1-2-5 序列、時基擴展、2Vpp 1kHz 校驗方波暫態過沖公式：ΔV(t)=c×0.8×exp(-t/40µs)</a:t>
+            </a:r>
+          </a:p>
+          <a:p>
+            <a:pPr>
+              <a:defRPr sz="1300" b="1">
+                <a:solidFill>
+                  <a:srgbClr val="C25E2E"/>
+                </a:solidFill>
+                <a:latin typeface="微軟正黑體"/>
+              </a:defRPr>
+            </a:pPr>
+            <a:r>
+              <a:t>🔹 2. GW INSTEK MFG-2000 原廠手冊</a:t>
+            </a:r>
+          </a:p>
+          <a:p>
+            <a:pPr>
+              <a:spcAft>
+                <a:spcPts val="600"/>
+              </a:spcAft>
+              <a:defRPr sz="1100">
+                <a:solidFill>
+                  <a:srgbClr val="2B2D42"/>
+                </a:solidFill>
+                <a:latin typeface="微軟正黑體"/>
+              </a:defRPr>
+            </a:pPr>
+            <a:r>
+              <a:t>   輸出阻抗 50Ω 負載效應模型：接示波器(1MΩ)端電壓放大 2 倍(設 3V 實出 6V)，High Z 則為 1 倍</a:t>
+            </a:r>
+          </a:p>
+          <a:p>
+            <a:pPr>
+              <a:defRPr sz="1300" b="1">
+                <a:solidFill>
+                  <a:srgbClr val="C25E2E"/>
+                </a:solidFill>
+                <a:latin typeface="微軟正黑體"/>
+              </a:defRPr>
+            </a:pPr>
+            <a:r>
+              <a:t>🔹 3. 工業電子丙級試題二規範 (02800-960302)</a:t>
+            </a:r>
+          </a:p>
+          <a:p>
+            <a:pPr>
+              <a:spcAft>
+                <a:spcPts val="600"/>
+              </a:spcAft>
+              <a:defRPr sz="1100">
+                <a:solidFill>
+                  <a:srgbClr val="2B2D42"/>
+                </a:solidFill>
+                <a:latin typeface="微軟正黑體"/>
+              </a:defRPr>
+            </a:pPr>
+            <a:r>
+              <a:t>   正弦波 1kHz 3Vpp 50Ω、探棒開關 1:1、DC 耦合；12 題組 ±10% 容許度與零點偏移扣分規準</a:t>
+            </a:r>
+          </a:p>
+          <a:p>
+            <a:pPr>
+              <a:defRPr sz="1300" b="1">
+                <a:solidFill>
+                  <a:srgbClr val="C25E2E"/>
+                </a:solidFill>
+                <a:latin typeface="微軟正黑體"/>
+              </a:defRPr>
+            </a:pPr>
+            <a:r>
+              <a:t>🔹 4. 全系統自動驗收腳本 (runAutoAudit)</a:t>
+            </a:r>
+          </a:p>
+          <a:p>
+            <a:pPr>
+              <a:spcAft>
+                <a:spcPts val="600"/>
+              </a:spcAft>
+              <a:defRPr sz="1100">
+                <a:solidFill>
+                  <a:srgbClr val="2B2D42"/>
+                </a:solidFill>
+                <a:latin typeface="微軟正黑體"/>
+              </a:defRPr>
+            </a:pPr>
+            <a:r>
+              <a:t>   內建 10 項驗收指標，單檔離線開立即可自我檢查合格！</a:t>
+            </a:r>
+          </a:p>
+        </p:txBody>
+      </p:sp>
+      <p:sp>
+        <p:nvSpPr>
+          <p:cNvPr id="10" name="Rounded Rectangle 9"/>
+          <p:cNvSpPr/>
+          <p:nvPr/>
+        </p:nvSpPr>
+        <p:spPr>
+          <a:xfrm>
+            <a:off x="6035040" y="1508760"/>
+            <a:ext cx="5394960" cy="4846320"/>
+          </a:xfrm>
+          <a:prstGeom prst="roundRect">
+            <a:avLst/>
+          </a:prstGeom>
+          <a:solidFill>
+            <a:srgbClr val="FFFFFF"/>
+          </a:solidFill>
+          <a:ln w="19050">
+            <a:solidFill>
+              <a:srgbClr val="E6E0D6"/>
+            </a:solidFill>
+          </a:ln>
+        </p:spPr>
+        <p:style>
+          <a:lnRef idx="1">
+            <a:schemeClr val="accent1"/>
+          </a:lnRef>
+          <a:fillRef idx="3">
+            <a:schemeClr val="accent1"/>
+          </a:fillRef>
+          <a:effectRef idx="2">
+            <a:schemeClr val="accent1"/>
+          </a:effectRef>
+          <a:fontRef idx="minor">
+            <a:schemeClr val="lt1"/>
+          </a:fontRef>
+        </p:style>
+        <p:txBody>
+          <a:bodyPr rtlCol="0" anchor="ctr"/>
+          <a:lstStyle/>
+          <a:p>
+            <a:pPr algn="ctr"/>
+          </a:p>
+        </p:txBody>
+      </p:sp>
+      <p:pic>
+        <p:nvPicPr>
+          <p:cNvPr id="11" name="Picture 10" descr="media_0.png"/>
+          <p:cNvPicPr>
+            <a:picLocks noChangeAspect="1"/>
+          </p:cNvPicPr>
+          <p:nvPr/>
+        </p:nvPicPr>
+        <p:blipFill>
+          <a:blip r:embed="rId2"/>
+          <a:stretch>
+            <a:fillRect/>
+          </a:stretch>
+        </p:blipFill>
+        <p:spPr>
+          <a:xfrm>
+            <a:off x="6172200" y="1691640"/>
+            <a:ext cx="5120640" cy="2370963"/>
+          </a:xfrm>
+          <a:prstGeom prst="rect">
+            <a:avLst/>
+          </a:prstGeom>
+        </p:spPr>
+      </p:pic>
+      <p:sp>
+        <p:nvSpPr>
+          <p:cNvPr id="12" name="TextBox 11"/>
+          <p:cNvSpPr txBox="1"/>
+          <p:nvPr/>
+        </p:nvSpPr>
+        <p:spPr>
+          <a:xfrm>
+            <a:off x="6172200" y="5303520"/>
+            <a:ext cx="5120640" cy="822960"/>
+          </a:xfrm>
+          <a:prstGeom prst="rect">
+            <a:avLst/>
+          </a:prstGeom>
+          <a:noFill/>
+        </p:spPr>
+        <p:txBody>
+          <a:bodyPr wrap="square">
+            <a:spAutoFit/>
+          </a:bodyPr>
+          <a:lstStyle/>
+          <a:p>
+            <a:pPr>
+              <a:defRPr sz="1100" b="1">
+                <a:solidFill>
+                  <a:srgbClr val="C25E2E"/>
+                </a:solidFill>
+                <a:latin typeface="微軟正黑體"/>
+              </a:defRPr>
+            </a:pPr>
+            <a:r>
+              <a:t>▲ 網頁內建【提示語與教學手冊】分頁：附帶一鍵複製提示語與 10 項標準即時自動稽核報告</a:t>
+            </a:r>
+          </a:p>
+        </p:txBody>
+      </p:sp>
+    </p:spTree>
+  </p:cSld>
+  <p:clrMapOvr>
+    <a:masterClrMapping/>
+  </p:clrMapOvr>
+  <p:transition spd="med">
+    <p:fade/>
+  </p:transition>
+</p:sld>
+</file>
+
+<file path=ppt/slides/slide26.xml><?xml version="1.0" encoding="utf-8"?>
+<p:sld xmlns:a="http://schemas.openxmlformats.org/drawingml/2006/main" xmlns:p="http://schemas.openxmlformats.org/presentationml/2006/main" xmlns:r="http://schemas.openxmlformats.org/officeDocument/2006/relationships">
+  <p:cSld>
+    <p:spTree>
+      <p:nvGrpSpPr>
+        <p:cNvPr id="1" name=""/>
+        <p:cNvGrpSpPr/>
+        <p:nvPr/>
+      </p:nvGrpSpPr>
+      <p:grpSpPr/>
+      <p:sp>
+        <p:nvSpPr>
+          <p:cNvPr id="2" name="Rectangle 1"/>
+          <p:cNvSpPr/>
+          <p:nvPr/>
+        </p:nvSpPr>
+        <p:spPr>
+          <a:xfrm>
+            <a:off x="0" y="0"/>
+            <a:ext cx="12191695" cy="6858000"/>
+          </a:xfrm>
+          <a:prstGeom prst="rect">
+            <a:avLst/>
+          </a:prstGeom>
+          <a:solidFill>
+            <a:srgbClr val="FAF7F2"/>
+          </a:solidFill>
+          <a:ln>
+            <a:noFill/>
+          </a:ln>
+        </p:spPr>
+        <p:style>
+          <a:lnRef idx="1">
+            <a:schemeClr val="accent1"/>
+          </a:lnRef>
+          <a:fillRef idx="3">
+            <a:schemeClr val="accent1"/>
+          </a:fillRef>
+          <a:effectRef idx="2">
+            <a:schemeClr val="accent1"/>
+          </a:effectRef>
+          <a:fontRef idx="minor">
+            <a:schemeClr val="lt1"/>
+          </a:fontRef>
+        </p:style>
+        <p:txBody>
+          <a:bodyPr rtlCol="0" anchor="ctr"/>
+          <a:lstStyle/>
+          <a:p>
+            <a:pPr algn="ctr"/>
+          </a:p>
+        </p:txBody>
+      </p:sp>
+      <p:sp>
+        <p:nvSpPr>
+          <p:cNvPr id="3" name="Rectangle 2"/>
+          <p:cNvSpPr/>
+          <p:nvPr/>
+        </p:nvSpPr>
+        <p:spPr>
+          <a:xfrm>
+            <a:off x="0" y="0"/>
+            <a:ext cx="12191695" cy="109728"/>
+          </a:xfrm>
+          <a:prstGeom prst="rect">
+            <a:avLst/>
+          </a:prstGeom>
+          <a:solidFill>
+            <a:srgbClr val="1F4435"/>
+          </a:solidFill>
+          <a:ln>
+            <a:noFill/>
+          </a:ln>
+        </p:spPr>
+        <p:style>
+          <a:lnRef idx="1">
+            <a:schemeClr val="accent1"/>
+          </a:lnRef>
+          <a:fillRef idx="3">
+            <a:schemeClr val="accent1"/>
+          </a:fillRef>
+          <a:effectRef idx="2">
+            <a:schemeClr val="accent1"/>
+          </a:effectRef>
+          <a:fontRef idx="minor">
+            <a:schemeClr val="lt1"/>
+          </a:fontRef>
+        </p:style>
+        <p:txBody>
+          <a:bodyPr rtlCol="0" anchor="ctr"/>
+          <a:lstStyle/>
+          <a:p>
+            <a:pPr algn="ctr"/>
+          </a:p>
+        </p:txBody>
+      </p:sp>
+      <p:sp>
+        <p:nvSpPr>
+          <p:cNvPr id="4" name="Rectangle 3"/>
+          <p:cNvSpPr/>
+          <p:nvPr/>
+        </p:nvSpPr>
+        <p:spPr>
+          <a:xfrm>
+            <a:off x="0" y="109728"/>
+            <a:ext cx="4114800" cy="36576"/>
+          </a:xfrm>
+          <a:prstGeom prst="rect">
+            <a:avLst/>
+          </a:prstGeom>
+          <a:solidFill>
+            <a:srgbClr val="C25E2E"/>
+          </a:solidFill>
+          <a:ln>
+            <a:noFill/>
+          </a:ln>
+        </p:spPr>
+        <p:style>
+          <a:lnRef idx="1">
+            <a:schemeClr val="accent1"/>
+          </a:lnRef>
+          <a:fillRef idx="3">
+            <a:schemeClr val="accent1"/>
+          </a:fillRef>
+          <a:effectRef idx="2">
+            <a:schemeClr val="accent1"/>
+          </a:effectRef>
+          <a:fontRef idx="minor">
+            <a:schemeClr val="lt1"/>
+          </a:fontRef>
+        </p:style>
+        <p:txBody>
+          <a:bodyPr rtlCol="0" anchor="ctr"/>
+          <a:lstStyle/>
+          <a:p>
+            <a:pPr algn="ctr"/>
+          </a:p>
+        </p:txBody>
+      </p:sp>
+      <p:sp>
+        <p:nvSpPr>
+          <p:cNvPr id="5" name="TextBox 4"/>
+          <p:cNvSpPr txBox="1"/>
+          <p:nvPr/>
+        </p:nvSpPr>
+        <p:spPr>
+          <a:xfrm>
+            <a:off x="731520" y="320040"/>
+            <a:ext cx="7772400" cy="320040"/>
+          </a:xfrm>
+          <a:prstGeom prst="rect">
+            <a:avLst/>
+          </a:prstGeom>
+          <a:noFill/>
+        </p:spPr>
+        <p:txBody>
+          <a:bodyPr wrap="none" lIns="0" tIns="0" rIns="0" bIns="0">
+            <a:spAutoFit/>
+          </a:bodyPr>
+          <a:lstStyle/>
+          <a:p>
+            <a:pPr>
+              <a:defRPr sz="1300" b="1">
+                <a:solidFill>
+                  <a:srgbClr val="C25E2E"/>
+                </a:solidFill>
+                <a:latin typeface="微軟正黑體"/>
+              </a:defRPr>
+            </a:pPr>
+            <a:r>
+              <a:t>🌿 ANTIGRAVITY 研習手冊  |  第七單元：高階實戰特輯</a:t>
+            </a:r>
+          </a:p>
+        </p:txBody>
+      </p:sp>
+      <p:sp>
+        <p:nvSpPr>
+          <p:cNvPr id="6" name="TextBox 5"/>
+          <p:cNvSpPr txBox="1"/>
+          <p:nvPr/>
+        </p:nvSpPr>
+        <p:spPr>
+          <a:xfrm>
+            <a:off x="9326880" y="320040"/>
+            <a:ext cx="2103120" cy="320040"/>
+          </a:xfrm>
+          <a:prstGeom prst="rect">
+            <a:avLst/>
+          </a:prstGeom>
+          <a:noFill/>
+        </p:spPr>
+        <p:txBody>
+          <a:bodyPr wrap="none" lIns="0" tIns="0" rIns="0" bIns="0">
+            <a:spAutoFit/>
+          </a:bodyPr>
+          <a:lstStyle/>
+          <a:p>
+            <a:pPr algn="r">
+              <a:defRPr sz="1300">
+                <a:solidFill>
+                  <a:srgbClr val="6C757D"/>
+                </a:solidFill>
+                <a:latin typeface="微軟正黑體"/>
+              </a:defRPr>
+            </a:pPr>
+            <a:r>
+              <a:t>第 26 / 27 頁</a:t>
+            </a:r>
+          </a:p>
+        </p:txBody>
+      </p:sp>
+      <p:sp>
+        <p:nvSpPr>
+          <p:cNvPr id="7" name="TextBox 6"/>
+          <p:cNvSpPr txBox="1"/>
+          <p:nvPr/>
+        </p:nvSpPr>
+        <p:spPr>
+          <a:xfrm>
+            <a:off x="731520" y="658368"/>
+            <a:ext cx="10698480" cy="685800"/>
+          </a:xfrm>
+          <a:prstGeom prst="rect">
+            <a:avLst/>
+          </a:prstGeom>
+          <a:noFill/>
+        </p:spPr>
+        <p:txBody>
+          <a:bodyPr wrap="square" lIns="0" tIns="0" rIns="0" bIns="0">
+            <a:spAutoFit/>
+          </a:bodyPr>
+          <a:lstStyle/>
+          <a:p>
+            <a:pPr>
+              <a:defRPr sz="2800" b="1">
+                <a:solidFill>
+                  <a:srgbClr val="1F4435"/>
+                </a:solidFill>
+                <a:latin typeface="微軟正黑體"/>
+              </a:defRPr>
+            </a:pPr>
+            <a:r>
+              <a:t>📌【實戰提示詞範本 08】儀表模擬器 Master Prompt</a:t>
+            </a:r>
+          </a:p>
+        </p:txBody>
+      </p:sp>
+      <p:sp>
+        <p:nvSpPr>
+          <p:cNvPr id="8" name="Rounded Rectangle 7"/>
+          <p:cNvSpPr/>
+          <p:nvPr/>
+        </p:nvSpPr>
+        <p:spPr>
+          <a:xfrm>
+            <a:off x="731520" y="1508760"/>
+            <a:ext cx="4389120" cy="4846320"/>
+          </a:xfrm>
+          <a:prstGeom prst="roundRect">
+            <a:avLst/>
+          </a:prstGeom>
+          <a:solidFill>
+            <a:srgbClr val="FFFFFF"/>
+          </a:solidFill>
+          <a:ln w="19050">
+            <a:solidFill>
+              <a:srgbClr val="E6E0D6"/>
+            </a:solidFill>
+          </a:ln>
+        </p:spPr>
+        <p:style>
+          <a:lnRef idx="1">
+            <a:schemeClr val="accent1"/>
+          </a:lnRef>
+          <a:fillRef idx="3">
+            <a:schemeClr val="accent1"/>
+          </a:fillRef>
+          <a:effectRef idx="2">
+            <a:schemeClr val="accent1"/>
+          </a:effectRef>
+          <a:fontRef idx="minor">
+            <a:schemeClr val="lt1"/>
+          </a:fontRef>
+        </p:style>
+        <p:txBody>
+          <a:bodyPr rtlCol="0" anchor="ctr"/>
+          <a:lstStyle/>
+          <a:p>
+            <a:pPr algn="ctr"/>
+          </a:p>
+        </p:txBody>
+      </p:sp>
+      <p:sp>
+        <p:nvSpPr>
+          <p:cNvPr id="9" name="TextBox 8"/>
+          <p:cNvSpPr txBox="1"/>
+          <p:nvPr/>
+        </p:nvSpPr>
+        <p:spPr>
+          <a:xfrm>
+            <a:off x="960120" y="1691640"/>
+            <a:ext cx="3931920" cy="4480560"/>
+          </a:xfrm>
+          <a:prstGeom prst="rect">
+            <a:avLst/>
+          </a:prstGeom>
+          <a:noFill/>
+        </p:spPr>
+        <p:txBody>
+          <a:bodyPr wrap="square">
+            <a:spAutoFit/>
+          </a:bodyPr>
+          <a:lstStyle/>
+          <a:p>
+            <a:pPr>
+              <a:spcAft>
+                <a:spcPts val="1000"/>
+              </a:spcAft>
+              <a:defRPr sz="1700" b="1">
+                <a:solidFill>
+                  <a:srgbClr val="1F4435"/>
+                </a:solidFill>
+                <a:latin typeface="微軟正黑體"/>
+              </a:defRPr>
+            </a:pPr>
+            <a:r>
+              <a:t>💡 五大工程級提示語心法</a:t>
+            </a:r>
+          </a:p>
+          <a:p>
+            <a:pPr>
+              <a:defRPr sz="1200" b="1">
+                <a:solidFill>
+                  <a:srgbClr val="C25E2E"/>
+                </a:solidFill>
+                <a:latin typeface="微軟正黑體"/>
+              </a:defRPr>
+            </a:pPr>
+            <a:r>
+              <a:t>1. [ROLE] 角色雙重錨定</a:t>
+            </a:r>
+          </a:p>
+          <a:p>
+            <a:pPr>
+              <a:spcAft>
+                <a:spcPts val="500"/>
+              </a:spcAft>
+              <a:defRPr sz="1100">
+                <a:solidFill>
+                  <a:srgbClr val="2B2D42"/>
+                </a:solidFill>
+                <a:latin typeface="微軟正黑體"/>
+              </a:defRPr>
+            </a:pPr>
+            <a:r>
+              <a:t>資工全端工程師 ＋ 金牌電子科實習指導教師，兼具代碼力與教學力。</a:t>
+            </a:r>
+          </a:p>
+          <a:p>
+            <a:pPr>
+              <a:defRPr sz="1200" b="1">
+                <a:solidFill>
+                  <a:srgbClr val="C25E2E"/>
+                </a:solidFill>
+                <a:latin typeface="微軟正黑體"/>
+              </a:defRPr>
+            </a:pPr>
+            <a:r>
+              <a:t>2. [WORKFLOW] 先計畫再代碼</a:t>
+            </a:r>
+          </a:p>
+          <a:p>
+            <a:pPr>
+              <a:spcAft>
+                <a:spcPts val="500"/>
+              </a:spcAft>
+              <a:defRPr sz="1100">
+                <a:solidFill>
+                  <a:srgbClr val="2B2D42"/>
+                </a:solidFill>
+                <a:latin typeface="微軟正黑體"/>
+              </a:defRPr>
+            </a:pPr>
+            <a:r>
+              <a:t>強制要求先產出 Plan Artifact，確認無誤後才動手寫程式。</a:t>
+            </a:r>
+          </a:p>
+          <a:p>
+            <a:pPr>
+              <a:defRPr sz="1200" b="1">
+                <a:solidFill>
+                  <a:srgbClr val="C25E2E"/>
+                </a:solidFill>
+                <a:latin typeface="微軟正黑體"/>
+              </a:defRPr>
+            </a:pPr>
+            <a:r>
+              <a:t>3. [MANUALS] 公式即規範</a:t>
+            </a:r>
+          </a:p>
+          <a:p>
+            <a:pPr>
+              <a:spcAft>
+                <a:spcPts val="500"/>
+              </a:spcAft>
+              <a:defRPr sz="1100">
+                <a:solidFill>
+                  <a:srgbClr val="2B2D42"/>
+                </a:solidFill>
+                <a:latin typeface="微軟正黑體"/>
+              </a:defRPr>
+            </a:pPr>
+            <a:r>
+              <a:t>直接貼入負載效應倍率、探棒過沖公式與檢定配分，AI 絕不瞎猜。</a:t>
+            </a:r>
+          </a:p>
+          <a:p>
+            <a:pPr>
+              <a:defRPr sz="1200" b="1">
+                <a:solidFill>
+                  <a:srgbClr val="C25E2E"/>
+                </a:solidFill>
+                <a:latin typeface="微軟正黑體"/>
+              </a:defRPr>
+            </a:pPr>
+            <a:r>
+              <a:t>4. [CONSTRAINTS] 極致硬性約束</a:t>
+            </a:r>
+          </a:p>
+          <a:p>
+            <a:pPr>
+              <a:spcAft>
+                <a:spcPts val="500"/>
+              </a:spcAft>
+              <a:defRPr sz="1100">
+                <a:solidFill>
+                  <a:srgbClr val="2B2D42"/>
+                </a:solidFill>
+                <a:latin typeface="微軟正黑體"/>
+              </a:defRPr>
+            </a:pPr>
+            <a:r>
+              <a:t>單檔 HTML 內嵌、離線執行、零外部相依、無障礙觸控 ≥40px。</a:t>
+            </a:r>
+          </a:p>
+          <a:p>
+            <a:pPr>
+              <a:defRPr sz="1200" b="1">
+                <a:solidFill>
+                  <a:srgbClr val="C25E2E"/>
+                </a:solidFill>
+                <a:latin typeface="微軟正黑體"/>
+              </a:defRPr>
+            </a:pPr>
+            <a:r>
+              <a:t>5. [ACCEPTANCE] 自動稽核機制</a:t>
+            </a:r>
+          </a:p>
+          <a:p>
+            <a:pPr>
+              <a:spcAft>
+                <a:spcPts val="500"/>
+              </a:spcAft>
+              <a:defRPr sz="1100">
+                <a:solidFill>
+                  <a:srgbClr val="2B2D42"/>
+                </a:solidFill>
+                <a:latin typeface="微軟正黑體"/>
+              </a:defRPr>
+            </a:pPr>
+            <a:r>
+              <a:t>要求提供 runAutoAudit() 自動檢查，以程式驗證程式！</a:t>
+            </a:r>
+          </a:p>
+        </p:txBody>
+      </p:sp>
+      <p:sp>
+        <p:nvSpPr>
+          <p:cNvPr id="10" name="Rounded Rectangle 9"/>
+          <p:cNvSpPr/>
+          <p:nvPr/>
+        </p:nvSpPr>
+        <p:spPr>
+          <a:xfrm>
+            <a:off x="5303520" y="1508760"/>
+            <a:ext cx="6126480" cy="4846320"/>
+          </a:xfrm>
+          <a:prstGeom prst="roundRect">
+            <a:avLst/>
+          </a:prstGeom>
+          <a:solidFill>
+            <a:srgbClr val="0F172A"/>
+          </a:solidFill>
+          <a:ln w="19050">
+            <a:solidFill>
+              <a:srgbClr val="E09F3E"/>
+            </a:solidFill>
+          </a:ln>
+        </p:spPr>
+        <p:style>
+          <a:lnRef idx="1">
+            <a:schemeClr val="accent1"/>
+          </a:lnRef>
+          <a:fillRef idx="3">
+            <a:schemeClr val="accent1"/>
+          </a:fillRef>
+          <a:effectRef idx="2">
+            <a:schemeClr val="accent1"/>
+          </a:effectRef>
+          <a:fontRef idx="minor">
+            <a:schemeClr val="lt1"/>
+          </a:fontRef>
+        </p:style>
+        <p:txBody>
+          <a:bodyPr rtlCol="0" anchor="ctr"/>
+          <a:lstStyle/>
+          <a:p>
+            <a:pPr algn="ctr"/>
+          </a:p>
+        </p:txBody>
+      </p:sp>
+      <p:sp>
+        <p:nvSpPr>
+          <p:cNvPr id="11" name="TextBox 10"/>
+          <p:cNvSpPr txBox="1"/>
+          <p:nvPr/>
+        </p:nvSpPr>
+        <p:spPr>
+          <a:xfrm>
+            <a:off x="5486400" y="1645920"/>
+            <a:ext cx="5760720" cy="4572000"/>
+          </a:xfrm>
+          <a:prstGeom prst="rect">
+            <a:avLst/>
+          </a:prstGeom>
+          <a:noFill/>
+        </p:spPr>
+        <p:txBody>
+          <a:bodyPr wrap="square">
+            <a:spAutoFit/>
+          </a:bodyPr>
+          <a:lstStyle/>
+          <a:p>
+            <a:pPr>
+              <a:spcAft>
+                <a:spcPts val="800"/>
+              </a:spcAft>
+              <a:defRPr sz="1200" b="1">
+                <a:solidFill>
+                  <a:srgbClr val="E09F3E"/>
+                </a:solidFill>
+                <a:latin typeface="Consolas"/>
+              </a:defRPr>
+            </a:pPr>
+            <a:r>
+              <a:t>💻 完整提示語核心代碼（可於網頁直接一鍵複製）：</a:t>
+            </a:r>
+          </a:p>
+          <a:p>
+            <a:pPr>
+              <a:defRPr sz="950">
+                <a:solidFill>
+                  <a:srgbClr val="F1F5F9"/>
+                </a:solidFill>
+                <a:latin typeface="Consolas"/>
+              </a:defRPr>
+            </a:pPr>
+            <a:r>
+              <a:t>[ROLE]</a:t>
+            </a:r>
+          </a:p>
+          <a:p>
+            <a:pPr>
+              <a:defRPr sz="950">
+                <a:solidFill>
+                  <a:srgbClr val="F1F5F9"/>
+                </a:solidFill>
+                <a:latin typeface="Consolas"/>
+              </a:defRPr>
+            </a:pPr>
+            <a:r>
+              <a:t>你是一位精通「電子量測儀器模擬」與「台灣工業電子檢定」的資深全端工程師兼實習指導教師。</a:t>
+            </a:r>
+          </a:p>
+          <a:p>
+            <a:pPr>
+              <a:defRPr sz="950">
+                <a:solidFill>
+                  <a:srgbClr val="F1F5F9"/>
+                </a:solidFill>
+                <a:latin typeface="Consolas"/>
+              </a:defRPr>
+            </a:pPr>
+          </a:p>
+          <a:p>
+            <a:pPr>
+              <a:defRPr sz="950">
+                <a:solidFill>
+                  <a:srgbClr val="F1F5F9"/>
+                </a:solidFill>
+                <a:latin typeface="Consolas"/>
+              </a:defRPr>
+            </a:pPr>
+            <a:r>
+              <a:t>[TASK]</a:t>
+            </a:r>
+          </a:p>
+          <a:p>
+            <a:pPr>
+              <a:defRPr sz="950">
+                <a:solidFill>
+                  <a:srgbClr val="F1F5F9"/>
+                </a:solidFill>
+                <a:latin typeface="Consolas"/>
+              </a:defRPr>
+            </a:pPr>
+            <a:r>
+              <a:t>請製作單一檔案、高度擬真的互動教學網頁 instrument.html：</a:t>
+            </a:r>
+          </a:p>
+          <a:p>
+            <a:pPr>
+              <a:defRPr sz="950">
+                <a:solidFill>
+                  <a:srgbClr val="F1F5F9"/>
+                </a:solidFill>
+                <a:latin typeface="Consolas"/>
+              </a:defRPr>
+            </a:pPr>
+            <a:r>
+              <a:t>1. GW INSTEK GDS-2102E 示波器 ＆ MFG-2110 任意波形信號產生器</a:t>
+            </a:r>
+          </a:p>
+          <a:p>
+            <a:pPr>
+              <a:defRPr sz="950">
+                <a:solidFill>
+                  <a:srgbClr val="F1F5F9"/>
+                </a:solidFill>
+                <a:latin typeface="Consolas"/>
+              </a:defRPr>
+            </a:pPr>
+            <a:r>
+              <a:t>2. 工業電子丙級試題二電路板量測與 12 題組除錯模擬</a:t>
+            </a:r>
+          </a:p>
+          <a:p>
+            <a:pPr>
+              <a:defRPr sz="950">
+                <a:solidFill>
+                  <a:srgbClr val="F1F5F9"/>
+                </a:solidFill>
+                <a:latin typeface="Consolas"/>
+              </a:defRPr>
+            </a:pPr>
+          </a:p>
+          <a:p>
+            <a:pPr>
+              <a:defRPr sz="950">
+                <a:solidFill>
+                  <a:srgbClr val="F1F5F9"/>
+                </a:solidFill>
+                <a:latin typeface="Consolas"/>
+              </a:defRPr>
+            </a:pPr>
+            <a:r>
+              <a:t>[MANUAL_REFERENCES]</a:t>
+            </a:r>
+          </a:p>
+          <a:p>
+            <a:pPr>
+              <a:defRPr sz="950">
+                <a:solidFill>
+                  <a:srgbClr val="F1F5F9"/>
+                </a:solidFill>
+                <a:latin typeface="Consolas"/>
+              </a:defRPr>
+            </a:pPr>
+            <a:r>
+              <a:t>1. GDS-2000E 手冊：垂直1-2-5序列、時基序列、2V方波過沖公式、靜態觸發鎖定。</a:t>
+            </a:r>
+          </a:p>
+          <a:p>
+            <a:pPr>
+              <a:defRPr sz="950">
+                <a:solidFill>
+                  <a:srgbClr val="F1F5F9"/>
+                </a:solidFill>
+                <a:latin typeface="Consolas"/>
+              </a:defRPr>
+            </a:pPr>
+            <a:r>
+              <a:t>2. MFG-2000 手冊：50Ω負載效應(接示波器實出2倍電壓)、 High Z為1倍。</a:t>
+            </a:r>
+          </a:p>
+          <a:p>
+            <a:pPr>
+              <a:defRPr sz="950">
+                <a:solidFill>
+                  <a:srgbClr val="F1F5F9"/>
+                </a:solidFill>
+                <a:latin typeface="Consolas"/>
+              </a:defRPr>
+            </a:pPr>
+            <a:r>
+              <a:t>3. 丙級試題二：正弦波 1kHz 3Vpp 50Ω、探棒1:1、DC耦合、12題組評分規準。</a:t>
+            </a:r>
+          </a:p>
+          <a:p>
+            <a:pPr>
+              <a:defRPr sz="950">
+                <a:solidFill>
+                  <a:srgbClr val="F1F5F9"/>
+                </a:solidFill>
+                <a:latin typeface="Consolas"/>
+              </a:defRPr>
+            </a:pPr>
+          </a:p>
+          <a:p>
+            <a:pPr>
+              <a:defRPr sz="950">
+                <a:solidFill>
+                  <a:srgbClr val="F1F5F9"/>
+                </a:solidFill>
+                <a:latin typeface="Consolas"/>
+              </a:defRPr>
+            </a:pPr>
+            <a:r>
+              <a:t>[HARD_CONSTRAINTS]</a:t>
+            </a:r>
+          </a:p>
+          <a:p>
+            <a:pPr>
+              <a:defRPr sz="950">
+                <a:solidFill>
+                  <a:srgbClr val="F1F5F9"/>
+                </a:solidFill>
+                <a:latin typeface="Consolas"/>
+              </a:defRPr>
+            </a:pPr>
+            <a:r>
+              <a:t>- 輸出單檔 instrument.html (純內嵌 CSS/SVG/JS，無外部CDN與字型)。</a:t>
+            </a:r>
+          </a:p>
+          <a:p>
+            <a:pPr>
+              <a:defRPr sz="950">
+                <a:solidFill>
+                  <a:srgbClr val="F1F5F9"/>
+                </a:solidFill>
+                <a:latin typeface="Consolas"/>
+              </a:defRPr>
+            </a:pPr>
+            <a:r>
+              <a:t>- 頂部提供【🔌 一鍵測試：信號產生器 ➔ 示波器 CH1】快捷操作。</a:t>
+            </a:r>
+          </a:p>
+          <a:p>
+            <a:pPr>
+              <a:defRPr sz="950">
+                <a:solidFill>
+                  <a:srgbClr val="F1F5F9"/>
+                </a:solidFill>
+                <a:latin typeface="Consolas"/>
+              </a:defRPr>
+            </a:pPr>
+            <a:r>
+              <a:t>- 靜態觸發鎖定：Trig'd 時鎖定正向過零相位，波形完全靜止清晰。</a:t>
+            </a:r>
+          </a:p>
+          <a:p>
+            <a:pPr>
+              <a:defRPr sz="950">
+                <a:solidFill>
+                  <a:srgbClr val="F1F5F9"/>
+                </a:solidFill>
+                <a:latin typeface="Consolas"/>
+              </a:defRPr>
+            </a:pPr>
+            <a:r>
+              <a:t>- 雙指引卡 10 步驟全自動播放教學引擎 (3.5s/步 連動實機按鈕)。</a:t>
+            </a:r>
+          </a:p>
+          <a:p>
+            <a:pPr>
+              <a:defRPr sz="950">
+                <a:solidFill>
+                  <a:srgbClr val="F1F5F9"/>
+                </a:solidFill>
+                <a:latin typeface="Consolas"/>
+              </a:defRPr>
+            </a:pPr>
+            <a:r>
+              <a:t>- 提供 window.runAutoAudit() 實施 10 項標準自動化檢驗。</a:t>
+            </a:r>
+          </a:p>
+        </p:txBody>
+      </p:sp>
+    </p:spTree>
+  </p:cSld>
+  <p:clrMapOvr>
+    <a:masterClrMapping/>
+  </p:clrMapOvr>
+  <p:transition spd="med">
+    <p:fade/>
+  </p:transition>
+</p:sld>
+</file>
+
+<file path=ppt/slides/slide27.xml><?xml version="1.0" encoding="utf-8"?>
+<p:sld xmlns:a="http://schemas.openxmlformats.org/drawingml/2006/main" xmlns:p="http://schemas.openxmlformats.org/presentationml/2006/main" xmlns:r="http://schemas.openxmlformats.org/officeDocument/2006/relationships">
+  <p:cSld>
+    <p:spTree>
+      <p:nvGrpSpPr>
+        <p:cNvPr id="1" name=""/>
+        <p:cNvGrpSpPr/>
+        <p:nvPr/>
+      </p:nvGrpSpPr>
+      <p:grpSpPr/>
+      <p:sp>
+        <p:nvSpPr>
+          <p:cNvPr id="2" name="Rectangle 1"/>
+          <p:cNvSpPr/>
+          <p:nvPr/>
+        </p:nvSpPr>
+        <p:spPr>
+          <a:xfrm>
+            <a:off x="0" y="0"/>
+            <a:ext cx="12191695" cy="6858000"/>
+          </a:xfrm>
+          <a:prstGeom prst="rect">
+            <a:avLst/>
+          </a:prstGeom>
+          <a:solidFill>
+            <a:srgbClr val="FAF7F2"/>
+          </a:solidFill>
+          <a:ln>
+            <a:noFill/>
+          </a:ln>
+        </p:spPr>
+        <p:style>
+          <a:lnRef idx="1">
+            <a:schemeClr val="accent1"/>
+          </a:lnRef>
+          <a:fillRef idx="3">
+            <a:schemeClr val="accent1"/>
+          </a:fillRef>
+          <a:effectRef idx="2">
+            <a:schemeClr val="accent1"/>
+          </a:effectRef>
+          <a:fontRef idx="minor">
+            <a:schemeClr val="lt1"/>
+          </a:fontRef>
+        </p:style>
+        <p:txBody>
+          <a:bodyPr rtlCol="0" anchor="ctr"/>
+          <a:lstStyle/>
+          <a:p>
+            <a:pPr algn="ctr"/>
+          </a:p>
+        </p:txBody>
+      </p:sp>
+      <p:sp>
+        <p:nvSpPr>
+          <p:cNvPr id="3" name="Rectangle 2"/>
+          <p:cNvSpPr/>
+          <p:nvPr/>
+        </p:nvSpPr>
+        <p:spPr>
+          <a:xfrm>
+            <a:off x="0" y="0"/>
+            <a:ext cx="12191695" cy="109728"/>
+          </a:xfrm>
+          <a:prstGeom prst="rect">
+            <a:avLst/>
+          </a:prstGeom>
+          <a:solidFill>
+            <a:srgbClr val="1F4435"/>
+          </a:solidFill>
+          <a:ln>
+            <a:noFill/>
+          </a:ln>
+        </p:spPr>
+        <p:style>
+          <a:lnRef idx="1">
+            <a:schemeClr val="accent1"/>
+          </a:lnRef>
+          <a:fillRef idx="3">
+            <a:schemeClr val="accent1"/>
+          </a:fillRef>
+          <a:effectRef idx="2">
+            <a:schemeClr val="accent1"/>
+          </a:effectRef>
+          <a:fontRef idx="minor">
+            <a:schemeClr val="lt1"/>
+          </a:fontRef>
+        </p:style>
+        <p:txBody>
+          <a:bodyPr rtlCol="0" anchor="ctr"/>
+          <a:lstStyle/>
+          <a:p>
+            <a:pPr algn="ctr"/>
+          </a:p>
+        </p:txBody>
+      </p:sp>
+      <p:sp>
+        <p:nvSpPr>
+          <p:cNvPr id="4" name="Rectangle 3"/>
+          <p:cNvSpPr/>
+          <p:nvPr/>
+        </p:nvSpPr>
+        <p:spPr>
+          <a:xfrm>
+            <a:off x="0" y="109728"/>
+            <a:ext cx="4114800" cy="36576"/>
+          </a:xfrm>
+          <a:prstGeom prst="rect">
+            <a:avLst/>
+          </a:prstGeom>
+          <a:solidFill>
+            <a:srgbClr val="C25E2E"/>
+          </a:solidFill>
+          <a:ln>
+            <a:noFill/>
+          </a:ln>
+        </p:spPr>
+        <p:style>
+          <a:lnRef idx="1">
+            <a:schemeClr val="accent1"/>
+          </a:lnRef>
+          <a:fillRef idx="3">
+            <a:schemeClr val="accent1"/>
+          </a:fillRef>
+          <a:effectRef idx="2">
+            <a:schemeClr val="accent1"/>
+          </a:effectRef>
+          <a:fontRef idx="minor">
+            <a:schemeClr val="lt1"/>
+          </a:fontRef>
+        </p:style>
+        <p:txBody>
+          <a:bodyPr rtlCol="0" anchor="ctr"/>
+          <a:lstStyle/>
+          <a:p>
+            <a:pPr algn="ctr"/>
+          </a:p>
+        </p:txBody>
+      </p:sp>
+      <p:sp>
+        <p:nvSpPr>
+          <p:cNvPr id="5" name="TextBox 4"/>
+          <p:cNvSpPr txBox="1"/>
+          <p:nvPr/>
+        </p:nvSpPr>
+        <p:spPr>
+          <a:xfrm>
+            <a:off x="731520" y="320040"/>
+            <a:ext cx="7772400" cy="320040"/>
+          </a:xfrm>
+          <a:prstGeom prst="rect">
+            <a:avLst/>
+          </a:prstGeom>
+          <a:noFill/>
+        </p:spPr>
+        <p:txBody>
+          <a:bodyPr wrap="none" lIns="0" tIns="0" rIns="0" bIns="0">
+            <a:spAutoFit/>
+          </a:bodyPr>
+          <a:lstStyle/>
+          <a:p>
+            <a:pPr>
+              <a:defRPr sz="1300" b="1">
+                <a:solidFill>
+                  <a:srgbClr val="C25E2E"/>
+                </a:solidFill>
+                <a:latin typeface="微軟正黑體"/>
+              </a:defRPr>
+            </a:pPr>
+            <a:r>
+              <a:t>🌿 ANTIGRAVITY 研習手冊  |  第七單元：高階實戰特輯</a:t>
+            </a:r>
+          </a:p>
+        </p:txBody>
+      </p:sp>
+      <p:sp>
+        <p:nvSpPr>
+          <p:cNvPr id="6" name="TextBox 5"/>
+          <p:cNvSpPr txBox="1"/>
+          <p:nvPr/>
+        </p:nvSpPr>
+        <p:spPr>
+          <a:xfrm>
+            <a:off x="9326880" y="320040"/>
+            <a:ext cx="2103120" cy="320040"/>
+          </a:xfrm>
+          <a:prstGeom prst="rect">
+            <a:avLst/>
+          </a:prstGeom>
+          <a:noFill/>
+        </p:spPr>
+        <p:txBody>
+          <a:bodyPr wrap="none" lIns="0" tIns="0" rIns="0" bIns="0">
+            <a:spAutoFit/>
+          </a:bodyPr>
+          <a:lstStyle/>
+          <a:p>
+            <a:pPr algn="r">
+              <a:defRPr sz="1300">
+                <a:solidFill>
+                  <a:srgbClr val="6C757D"/>
+                </a:solidFill>
+                <a:latin typeface="微軟正黑體"/>
+              </a:defRPr>
+            </a:pPr>
+            <a:r>
+              <a:t>第 27 / 27 頁</a:t>
+            </a:r>
+          </a:p>
+        </p:txBody>
+      </p:sp>
+      <p:sp>
+        <p:nvSpPr>
+          <p:cNvPr id="7" name="TextBox 6"/>
+          <p:cNvSpPr txBox="1"/>
+          <p:nvPr/>
+        </p:nvSpPr>
+        <p:spPr>
+          <a:xfrm>
+            <a:off x="731520" y="658368"/>
+            <a:ext cx="10698480" cy="685800"/>
+          </a:xfrm>
+          <a:prstGeom prst="rect">
+            <a:avLst/>
+          </a:prstGeom>
+          <a:noFill/>
+        </p:spPr>
+        <p:txBody>
+          <a:bodyPr wrap="square" lIns="0" tIns="0" rIns="0" bIns="0">
+            <a:spAutoFit/>
+          </a:bodyPr>
+          <a:lstStyle/>
+          <a:p>
+            <a:pPr>
+              <a:defRPr sz="2800" b="1">
+                <a:solidFill>
+                  <a:srgbClr val="1F4435"/>
+                </a:solidFill>
+                <a:latin typeface="微軟正黑體"/>
+              </a:defRPr>
+            </a:pPr>
+            <a:r>
+              <a:t>教師的思維升級：從辦公自動化走向「專題級課程開發」</a:t>
+            </a:r>
+          </a:p>
+        </p:txBody>
+      </p:sp>
+      <p:sp>
+        <p:nvSpPr>
+          <p:cNvPr id="8" name="Rounded Rectangle 7"/>
+          <p:cNvSpPr/>
+          <p:nvPr/>
+        </p:nvSpPr>
+        <p:spPr>
+          <a:xfrm>
+            <a:off x="731520" y="1645920"/>
+            <a:ext cx="5120640" cy="4389120"/>
+          </a:xfrm>
+          <a:prstGeom prst="roundRect">
+            <a:avLst/>
+          </a:prstGeom>
+          <a:solidFill>
+            <a:srgbClr val="FFFFFF"/>
+          </a:solidFill>
+          <a:ln w="19050">
+            <a:solidFill>
+              <a:srgbClr val="E6E0D6"/>
+            </a:solidFill>
+          </a:ln>
+        </p:spPr>
+        <p:style>
+          <a:lnRef idx="1">
+            <a:schemeClr val="accent1"/>
+          </a:lnRef>
+          <a:fillRef idx="3">
+            <a:schemeClr val="accent1"/>
+          </a:fillRef>
+          <a:effectRef idx="2">
+            <a:schemeClr val="accent1"/>
+          </a:effectRef>
+          <a:fontRef idx="minor">
+            <a:schemeClr val="lt1"/>
+          </a:fontRef>
+        </p:style>
+        <p:txBody>
+          <a:bodyPr rtlCol="0" anchor="ctr"/>
+          <a:lstStyle/>
+          <a:p>
+            <a:pPr algn="ctr"/>
+          </a:p>
+        </p:txBody>
+      </p:sp>
+      <p:sp>
+        <p:nvSpPr>
+          <p:cNvPr id="9" name="TextBox 8"/>
+          <p:cNvSpPr txBox="1"/>
+          <p:nvPr/>
+        </p:nvSpPr>
+        <p:spPr>
+          <a:xfrm>
+            <a:off x="1005840" y="1920240"/>
+            <a:ext cx="4572000" cy="3840480"/>
+          </a:xfrm>
+          <a:prstGeom prst="rect">
+            <a:avLst/>
+          </a:prstGeom>
+          <a:noFill/>
+        </p:spPr>
+        <p:txBody>
+          <a:bodyPr wrap="square">
+            <a:spAutoFit/>
+          </a:bodyPr>
+          <a:lstStyle/>
+          <a:p>
+            <a:pPr>
+              <a:spcAft>
+                <a:spcPts val="1400"/>
+              </a:spcAft>
+              <a:defRPr sz="2000" b="1">
+                <a:solidFill>
+                  <a:srgbClr val="1F4435"/>
+                </a:solidFill>
+                <a:latin typeface="微軟正黑體"/>
+              </a:defRPr>
+            </a:pPr>
+            <a:r>
+              <a:t>🚀 三大關鍵教具開發心態</a:t>
+            </a:r>
+          </a:p>
+          <a:p>
+            <a:pPr>
+              <a:defRPr sz="1300" b="1">
+                <a:solidFill>
+                  <a:srgbClr val="C25E2E"/>
+                </a:solidFill>
+                <a:latin typeface="微軟正黑體"/>
+              </a:defRPr>
+            </a:pPr>
+            <a:r>
+              <a:t>🧩 模組化規格思維</a:t>
+            </a:r>
+          </a:p>
+          <a:p>
+            <a:pPr>
+              <a:spcAft>
+                <a:spcPts val="800"/>
+              </a:spcAft>
+              <a:defRPr sz="1150">
+                <a:solidFill>
+                  <a:srgbClr val="2B2D42"/>
+                </a:solidFill>
+                <a:latin typeface="微軟正黑體"/>
+              </a:defRPr>
+            </a:pPr>
+            <a:r>
+              <a:t>AI 不是魔術，AI 需要精準的「規格說明書」。懂得定義功能邊界，AI 就能打造工程級作品。</a:t>
+            </a:r>
+          </a:p>
+          <a:p>
+            <a:pPr>
+              <a:defRPr sz="1300" b="1">
+                <a:solidFill>
+                  <a:srgbClr val="C25E2E"/>
+                </a:solidFill>
+                <a:latin typeface="微軟正黑體"/>
+              </a:defRPr>
+            </a:pPr>
+            <a:r>
+              <a:t>🔬 公式即代碼規範</a:t>
+            </a:r>
+          </a:p>
+          <a:p>
+            <a:pPr>
+              <a:spcAft>
+                <a:spcPts val="800"/>
+              </a:spcAft>
+              <a:defRPr sz="1150">
+                <a:solidFill>
+                  <a:srgbClr val="2B2D42"/>
+                </a:solidFill>
+                <a:latin typeface="微軟正黑體"/>
+              </a:defRPr>
+            </a:pPr>
+            <a:r>
+              <a:t>把課本與原廠手冊公式寫進 Prompt，AI 就能做出物理級高擬真教具，不再只是玩具。</a:t>
+            </a:r>
+          </a:p>
+          <a:p>
+            <a:pPr>
+              <a:defRPr sz="1300" b="1">
+                <a:solidFill>
+                  <a:srgbClr val="C25E2E"/>
+                </a:solidFill>
+                <a:latin typeface="微軟正黑體"/>
+              </a:defRPr>
+            </a:pPr>
+            <a:r>
+              <a:t>🌟 人人皆能打造專屬教具</a:t>
+            </a:r>
+          </a:p>
+          <a:p>
+            <a:pPr>
+              <a:spcAft>
+                <a:spcPts val="800"/>
+              </a:spcAft>
+              <a:defRPr sz="1150">
+                <a:solidFill>
+                  <a:srgbClr val="2B2D42"/>
+                </a:solidFill>
+                <a:latin typeface="微軟正黑體"/>
+              </a:defRPr>
+            </a:pPr>
+            <a:r>
+              <a:t>不需等待廠商開發！只要您具備學科專業＋下對 Prompt，每門實習課都能擁有專屬線上實驗室！</a:t>
+            </a:r>
+          </a:p>
+        </p:txBody>
+      </p:sp>
+      <p:sp>
+        <p:nvSpPr>
+          <p:cNvPr id="10" name="Rounded Rectangle 9"/>
+          <p:cNvSpPr/>
+          <p:nvPr/>
+        </p:nvSpPr>
+        <p:spPr>
+          <a:xfrm>
+            <a:off x="6309360" y="1645920"/>
+            <a:ext cx="5120640" cy="4389120"/>
+          </a:xfrm>
+          <a:prstGeom prst="roundRect">
+            <a:avLst/>
+          </a:prstGeom>
+          <a:solidFill>
+            <a:srgbClr val="FFFFFF"/>
+          </a:solidFill>
+          <a:ln w="19050">
+            <a:solidFill>
+              <a:srgbClr val="C25E2E"/>
+            </a:solidFill>
+          </a:ln>
+        </p:spPr>
+        <p:style>
+          <a:lnRef idx="1">
+            <a:schemeClr val="accent1"/>
+          </a:lnRef>
+          <a:fillRef idx="3">
+            <a:schemeClr val="accent1"/>
+          </a:fillRef>
+          <a:effectRef idx="2">
+            <a:schemeClr val="accent1"/>
+          </a:effectRef>
+          <a:fontRef idx="minor">
+            <a:schemeClr val="lt1"/>
+          </a:fontRef>
+        </p:style>
+        <p:txBody>
+          <a:bodyPr rtlCol="0" anchor="ctr"/>
+          <a:lstStyle/>
+          <a:p>
+            <a:pPr algn="ctr"/>
+          </a:p>
+        </p:txBody>
+      </p:sp>
+      <p:sp>
+        <p:nvSpPr>
+          <p:cNvPr id="11" name="TextBox 10"/>
+          <p:cNvSpPr txBox="1"/>
+          <p:nvPr/>
+        </p:nvSpPr>
+        <p:spPr>
+          <a:xfrm>
+            <a:off x="6583680" y="1920240"/>
+            <a:ext cx="4572000" cy="3840480"/>
+          </a:xfrm>
+          <a:prstGeom prst="rect">
+            <a:avLst/>
+          </a:prstGeom>
+          <a:noFill/>
+        </p:spPr>
+        <p:txBody>
+          <a:bodyPr wrap="square">
+            <a:spAutoFit/>
+          </a:bodyPr>
+          <a:lstStyle/>
+          <a:p>
+            <a:pPr>
+              <a:spcAft>
+                <a:spcPts val="1600"/>
+              </a:spcAft>
+              <a:defRPr sz="2000" b="1">
+                <a:solidFill>
+                  <a:srgbClr val="C25E2E"/>
+                </a:solidFill>
+                <a:latin typeface="微軟正黑體"/>
+              </a:defRPr>
+            </a:pPr>
+            <a:r>
+              <a:t>🎓 研習總結金句</a:t>
+            </a:r>
+          </a:p>
+          <a:p>
+            <a:pPr>
+              <a:spcAft>
+                <a:spcPts val="400"/>
+              </a:spcAft>
+              <a:defRPr sz="1200">
+                <a:solidFill>
+                  <a:srgbClr val="2B2D42"/>
+                </a:solidFill>
+                <a:latin typeface="微軟正黑體"/>
+              </a:defRPr>
+            </a:pPr>
+            <a:r>
+              <a:t>「AI 不會取代老師，</a:t>
+            </a:r>
+          </a:p>
+          <a:p>
+            <a:pPr>
+              <a:spcAft>
+                <a:spcPts val="400"/>
+              </a:spcAft>
+              <a:defRPr sz="1200">
+                <a:solidFill>
+                  <a:srgbClr val="2B2D42"/>
+                </a:solidFill>
+                <a:latin typeface="微軟正黑體"/>
+              </a:defRPr>
+            </a:pPr>
+            <a:r>
+              <a:t>但善用代理 AI 開發教具的老師，</a:t>
+            </a:r>
+          </a:p>
+          <a:p>
+            <a:pPr>
+              <a:spcAft>
+                <a:spcPts val="400"/>
+              </a:spcAft>
+              <a:defRPr sz="1500" b="1">
+                <a:solidFill>
+                  <a:srgbClr val="1F4435"/>
+                </a:solidFill>
+                <a:latin typeface="微軟正黑體"/>
+              </a:defRPr>
+            </a:pPr>
+            <a:r>
+              <a:t>將徹底點亮學生的學習視野！」</a:t>
+            </a:r>
+          </a:p>
+          <a:p>
+            <a:pPr>
+              <a:spcAft>
+                <a:spcPts val="400"/>
+              </a:spcAft>
+              <a:defRPr sz="1200">
+                <a:solidFill>
+                  <a:srgbClr val="2B2D42"/>
+                </a:solidFill>
+                <a:latin typeface="微軟正黑體"/>
+              </a:defRPr>
+            </a:pPr>
+          </a:p>
+          <a:p>
+            <a:pPr>
+              <a:spcAft>
+                <a:spcPts val="400"/>
+              </a:spcAft>
+              <a:defRPr sz="1300" b="1">
+                <a:solidFill>
+                  <a:srgbClr val="C25E2E"/>
+                </a:solidFill>
+                <a:latin typeface="微軟正黑體"/>
+              </a:defRPr>
+            </a:pPr>
+            <a:r>
+              <a:t>下週第二場見！我們將挑戰：</a:t>
+            </a:r>
+          </a:p>
+          <a:p>
+            <a:pPr>
+              <a:spcAft>
+                <a:spcPts val="400"/>
+              </a:spcAft>
+              <a:defRPr sz="1200">
+                <a:solidFill>
+                  <a:srgbClr val="2B2D42"/>
+                </a:solidFill>
+                <a:latin typeface="微軟正黑體"/>
+              </a:defRPr>
+            </a:pPr>
+            <a:r>
+              <a:t>• 零程式碼製作課堂隨機抽籤與計分遊戲</a:t>
+            </a:r>
+          </a:p>
+          <a:p>
+            <a:pPr>
+              <a:spcAft>
+                <a:spcPts val="400"/>
+              </a:spcAft>
+              <a:defRPr sz="1200">
+                <a:solidFill>
+                  <a:srgbClr val="2B2D42"/>
+                </a:solidFill>
+                <a:latin typeface="微軟正黑體"/>
+              </a:defRPr>
+            </a:pPr>
+            <a:r>
+              <a:t>• 一鍵產出教案、PPT 並自動配音錄製微課！</a:t>
+            </a:r>
+          </a:p>
+        </p:txBody>
+      </p:sp>
+    </p:spTree>
+  </p:cSld>
+  <p:clrMapOvr>
+    <a:masterClrMapping/>
+  </p:clrMapOvr>
+  <p:transition spd="med">
+    <p:fade/>
+  </p:transition>
+</p:sld>
+</file>
+
 <file path=ppt/slides/slide3.xml><?xml version="1.0" encoding="utf-8"?>
 <p:sld xmlns:a="http://schemas.openxmlformats.org/drawingml/2006/main" xmlns:p="http://schemas.openxmlformats.org/presentationml/2006/main" xmlns:r="http://schemas.openxmlformats.org/officeDocument/2006/relationships">
   <p:cSld>

--- a/slides.pptx
+++ b/slides.pptx
@@ -32,6 +32,7 @@
     <p:sldId id="280" r:id="rId32"/>
     <p:sldId id="281" r:id="rId33"/>
     <p:sldId id="282" r:id="rId34"/>
+    <p:sldId id="283" r:id="rId35"/>
   </p:sldIdLst>
   <p:sldSz cx="12191695" cy="6858000" type="screen4x3"/>
   <p:notesSz cx="6858000" cy="9144000"/>
@@ -14874,7 +14875,7 @@
               </a:defRPr>
             </a:pPr>
             <a:r>
-              <a:t>第 24 / 27 頁</a:t>
+              <a:t>第 24 / 28 頁</a:t>
             </a:r>
           </a:p>
         </p:txBody>
@@ -15417,7 +15418,7 @@
               </a:defRPr>
             </a:pPr>
             <a:r>
-              <a:t>第 25 / 27 頁</a:t>
+              <a:t>第 25 / 28 頁</a:t>
             </a:r>
           </a:p>
         </p:txBody>
@@ -15980,7 +15981,7 @@
               </a:defRPr>
             </a:pPr>
             <a:r>
-              <a:t>第 26 / 27 頁</a:t>
+              <a:t>第 26 / 28 頁</a:t>
             </a:r>
           </a:p>
         </p:txBody>
@@ -16016,7 +16017,7 @@
               </a:defRPr>
             </a:pPr>
             <a:r>
-              <a:t>📌【實戰提示詞範本 08】儀表模擬器 Master Prompt</a:t>
+              <a:t>📌【完整提示語 Master Prompt (上篇)】角色定位與資料手冊規範</a:t>
             </a:r>
           </a:p>
         </p:txBody>
@@ -16030,236 +16031,7 @@
         <p:spPr>
           <a:xfrm>
             <a:off x="731520" y="1508760"/>
-            <a:ext cx="4389120" cy="4846320"/>
-          </a:xfrm>
-          <a:prstGeom prst="roundRect">
-            <a:avLst/>
-          </a:prstGeom>
-          <a:solidFill>
-            <a:srgbClr val="FFFFFF"/>
-          </a:solidFill>
-          <a:ln w="19050">
-            <a:solidFill>
-              <a:srgbClr val="E6E0D6"/>
-            </a:solidFill>
-          </a:ln>
-        </p:spPr>
-        <p:style>
-          <a:lnRef idx="1">
-            <a:schemeClr val="accent1"/>
-          </a:lnRef>
-          <a:fillRef idx="3">
-            <a:schemeClr val="accent1"/>
-          </a:fillRef>
-          <a:effectRef idx="2">
-            <a:schemeClr val="accent1"/>
-          </a:effectRef>
-          <a:fontRef idx="minor">
-            <a:schemeClr val="lt1"/>
-          </a:fontRef>
-        </p:style>
-        <p:txBody>
-          <a:bodyPr rtlCol="0" anchor="ctr"/>
-          <a:lstStyle/>
-          <a:p>
-            <a:pPr algn="ctr"/>
-          </a:p>
-        </p:txBody>
-      </p:sp>
-      <p:sp>
-        <p:nvSpPr>
-          <p:cNvPr id="9" name="TextBox 8"/>
-          <p:cNvSpPr txBox="1"/>
-          <p:nvPr/>
-        </p:nvSpPr>
-        <p:spPr>
-          <a:xfrm>
-            <a:off x="960120" y="1691640"/>
-            <a:ext cx="3931920" cy="4480560"/>
-          </a:xfrm>
-          <a:prstGeom prst="rect">
-            <a:avLst/>
-          </a:prstGeom>
-          <a:noFill/>
-        </p:spPr>
-        <p:txBody>
-          <a:bodyPr wrap="square">
-            <a:spAutoFit/>
-          </a:bodyPr>
-          <a:lstStyle/>
-          <a:p>
-            <a:pPr>
-              <a:spcAft>
-                <a:spcPts val="1000"/>
-              </a:spcAft>
-              <a:defRPr sz="1700" b="1">
-                <a:solidFill>
-                  <a:srgbClr val="1F4435"/>
-                </a:solidFill>
-                <a:latin typeface="微軟正黑體"/>
-              </a:defRPr>
-            </a:pPr>
-            <a:r>
-              <a:t>💡 五大工程級提示語心法</a:t>
-            </a:r>
-          </a:p>
-          <a:p>
-            <a:pPr>
-              <a:defRPr sz="1200" b="1">
-                <a:solidFill>
-                  <a:srgbClr val="C25E2E"/>
-                </a:solidFill>
-                <a:latin typeface="微軟正黑體"/>
-              </a:defRPr>
-            </a:pPr>
-            <a:r>
-              <a:t>1. [ROLE] 角色雙重錨定</a:t>
-            </a:r>
-          </a:p>
-          <a:p>
-            <a:pPr>
-              <a:spcAft>
-                <a:spcPts val="500"/>
-              </a:spcAft>
-              <a:defRPr sz="1100">
-                <a:solidFill>
-                  <a:srgbClr val="2B2D42"/>
-                </a:solidFill>
-                <a:latin typeface="微軟正黑體"/>
-              </a:defRPr>
-            </a:pPr>
-            <a:r>
-              <a:t>資工全端工程師 ＋ 金牌電子科實習指導教師，兼具代碼力與教學力。</a:t>
-            </a:r>
-          </a:p>
-          <a:p>
-            <a:pPr>
-              <a:defRPr sz="1200" b="1">
-                <a:solidFill>
-                  <a:srgbClr val="C25E2E"/>
-                </a:solidFill>
-                <a:latin typeface="微軟正黑體"/>
-              </a:defRPr>
-            </a:pPr>
-            <a:r>
-              <a:t>2. [WORKFLOW] 先計畫再代碼</a:t>
-            </a:r>
-          </a:p>
-          <a:p>
-            <a:pPr>
-              <a:spcAft>
-                <a:spcPts val="500"/>
-              </a:spcAft>
-              <a:defRPr sz="1100">
-                <a:solidFill>
-                  <a:srgbClr val="2B2D42"/>
-                </a:solidFill>
-                <a:latin typeface="微軟正黑體"/>
-              </a:defRPr>
-            </a:pPr>
-            <a:r>
-              <a:t>強制要求先產出 Plan Artifact，確認無誤後才動手寫程式。</a:t>
-            </a:r>
-          </a:p>
-          <a:p>
-            <a:pPr>
-              <a:defRPr sz="1200" b="1">
-                <a:solidFill>
-                  <a:srgbClr val="C25E2E"/>
-                </a:solidFill>
-                <a:latin typeface="微軟正黑體"/>
-              </a:defRPr>
-            </a:pPr>
-            <a:r>
-              <a:t>3. [MANUALS] 公式即規範</a:t>
-            </a:r>
-          </a:p>
-          <a:p>
-            <a:pPr>
-              <a:spcAft>
-                <a:spcPts val="500"/>
-              </a:spcAft>
-              <a:defRPr sz="1100">
-                <a:solidFill>
-                  <a:srgbClr val="2B2D42"/>
-                </a:solidFill>
-                <a:latin typeface="微軟正黑體"/>
-              </a:defRPr>
-            </a:pPr>
-            <a:r>
-              <a:t>直接貼入負載效應倍率、探棒過沖公式與檢定配分，AI 絕不瞎猜。</a:t>
-            </a:r>
-          </a:p>
-          <a:p>
-            <a:pPr>
-              <a:defRPr sz="1200" b="1">
-                <a:solidFill>
-                  <a:srgbClr val="C25E2E"/>
-                </a:solidFill>
-                <a:latin typeface="微軟正黑體"/>
-              </a:defRPr>
-            </a:pPr>
-            <a:r>
-              <a:t>4. [CONSTRAINTS] 極致硬性約束</a:t>
-            </a:r>
-          </a:p>
-          <a:p>
-            <a:pPr>
-              <a:spcAft>
-                <a:spcPts val="500"/>
-              </a:spcAft>
-              <a:defRPr sz="1100">
-                <a:solidFill>
-                  <a:srgbClr val="2B2D42"/>
-                </a:solidFill>
-                <a:latin typeface="微軟正黑體"/>
-              </a:defRPr>
-            </a:pPr>
-            <a:r>
-              <a:t>單檔 HTML 內嵌、離線執行、零外部相依、無障礙觸控 ≥40px。</a:t>
-            </a:r>
-          </a:p>
-          <a:p>
-            <a:pPr>
-              <a:defRPr sz="1200" b="1">
-                <a:solidFill>
-                  <a:srgbClr val="C25E2E"/>
-                </a:solidFill>
-                <a:latin typeface="微軟正黑體"/>
-              </a:defRPr>
-            </a:pPr>
-            <a:r>
-              <a:t>5. [ACCEPTANCE] 自動稽核機制</a:t>
-            </a:r>
-          </a:p>
-          <a:p>
-            <a:pPr>
-              <a:spcAft>
-                <a:spcPts val="500"/>
-              </a:spcAft>
-              <a:defRPr sz="1100">
-                <a:solidFill>
-                  <a:srgbClr val="2B2D42"/>
-                </a:solidFill>
-                <a:latin typeface="微軟正黑體"/>
-              </a:defRPr>
-            </a:pPr>
-            <a:r>
-              <a:t>要求提供 runAutoAudit() 自動檢查，以程式驗證程式！</a:t>
-            </a:r>
-          </a:p>
-        </p:txBody>
-      </p:sp>
-      <p:sp>
-        <p:nvSpPr>
-          <p:cNvPr id="10" name="Rounded Rectangle 9"/>
-          <p:cNvSpPr/>
-          <p:nvPr/>
-        </p:nvSpPr>
-        <p:spPr>
-          <a:xfrm>
-            <a:off x="5303520" y="1508760"/>
-            <a:ext cx="6126480" cy="4846320"/>
+            <a:ext cx="10698480" cy="4846320"/>
           </a:xfrm>
           <a:prstGeom prst="roundRect">
             <a:avLst/>
@@ -16297,14 +16069,14 @@
       </p:sp>
       <p:sp>
         <p:nvSpPr>
-          <p:cNvPr id="11" name="TextBox 10"/>
+          <p:cNvPr id="9" name="TextBox 8"/>
           <p:cNvSpPr txBox="1"/>
           <p:nvPr/>
         </p:nvSpPr>
         <p:spPr>
           <a:xfrm>
-            <a:off x="5486400" y="1645920"/>
-            <a:ext cx="5760720" cy="4572000"/>
+            <a:off x="960120" y="1645920"/>
+            <a:ext cx="10241280" cy="4572000"/>
           </a:xfrm>
           <a:prstGeom prst="rect">
             <a:avLst/>
@@ -16319,7 +16091,7 @@
           <a:p>
             <a:pPr>
               <a:spcAft>
-                <a:spcPts val="800"/>
+                <a:spcPts val="600"/>
               </a:spcAft>
               <a:defRPr sz="1200" b="1">
                 <a:solidFill>
@@ -16329,12 +16101,12 @@
               </a:defRPr>
             </a:pPr>
             <a:r>
-              <a:t>💻 完整提示語核心代碼（可於網頁直接一鍵複製）：</a:t>
-            </a:r>
-          </a:p>
-          <a:p>
-            <a:pPr>
-              <a:defRPr sz="950">
+              <a:t>💻 完整提示語代碼塊（前半段：角色定義、任務目標與三大手冊物理規範）</a:t>
+            </a:r>
+          </a:p>
+          <a:p>
+            <a:pPr>
+              <a:defRPr sz="850">
                 <a:solidFill>
                   <a:srgbClr val="F1F5F9"/>
                 </a:solidFill>
@@ -16347,7 +16119,7 @@
           </a:p>
           <a:p>
             <a:pPr>
-              <a:defRPr sz="950">
+              <a:defRPr sz="850">
                 <a:solidFill>
                   <a:srgbClr val="F1F5F9"/>
                 </a:solidFill>
@@ -16355,12 +16127,12 @@
               </a:defRPr>
             </a:pPr>
             <a:r>
-              <a:t>你是一位精通「電子量測儀器模擬」與「台灣工業電子檢定」的資深全端工程師兼實習指導教師。</a:t>
-            </a:r>
-          </a:p>
-          <a:p>
-            <a:pPr>
-              <a:defRPr sz="950">
+              <a:t>你是一位精通「電子量測儀器硬體模擬」與「台灣技術士技能檢定工業電子職類術科規範」的資深全端工程師兼金牌實習指導教師。</a:t>
+            </a:r>
+          </a:p>
+          <a:p>
+            <a:pPr>
+              <a:defRPr sz="850">
                 <a:solidFill>
                   <a:srgbClr val="F1F5F9"/>
                 </a:solidFill>
@@ -16370,7 +16142,7 @@
           </a:p>
           <a:p>
             <a:pPr>
-              <a:defRPr sz="950">
+              <a:defRPr sz="850">
                 <a:solidFill>
                   <a:srgbClr val="F1F5F9"/>
                 </a:solidFill>
@@ -16383,7 +16155,7 @@
           </a:p>
           <a:p>
             <a:pPr>
-              <a:defRPr sz="950">
+              <a:defRPr sz="850">
                 <a:solidFill>
                   <a:srgbClr val="F1F5F9"/>
                 </a:solidFill>
@@ -16391,12 +16163,12 @@
               </a:defRPr>
             </a:pPr>
             <a:r>
-              <a:t>請製作單一檔案、高度擬真的互動教學網頁 instrument.html：</a:t>
-            </a:r>
-          </a:p>
-          <a:p>
-            <a:pPr>
-              <a:defRPr sz="950">
+              <a:t>請製作一份單一檔案、高度擬真、具備完整互動操作功能的網頁模擬系統（instrument.html）：</a:t>
+            </a:r>
+          </a:p>
+          <a:p>
+            <a:pPr>
+              <a:defRPr sz="850">
                 <a:solidFill>
                   <a:srgbClr val="F1F5F9"/>
                 </a:solidFill>
@@ -16404,12 +16176,12 @@
               </a:defRPr>
             </a:pPr>
             <a:r>
-              <a:t>1. GW INSTEK GDS-2102E 示波器 ＆ MFG-2110 任意波形信號產生器</a:t>
-            </a:r>
-          </a:p>
-          <a:p>
-            <a:pPr>
-              <a:defRPr sz="950">
+              <a:t>1. 固緯 GW INSTEK GDS-2102E 數位儲存示波器 ＆ MFG-2110 任意波形信號產生器</a:t>
+            </a:r>
+          </a:p>
+          <a:p>
+            <a:pPr>
+              <a:defRPr sz="850">
                 <a:solidFill>
                   <a:srgbClr val="F1F5F9"/>
                 </a:solidFill>
@@ -16417,12 +16189,12 @@
               </a:defRPr>
             </a:pPr>
             <a:r>
-              <a:t>2. 工業電子丙級試題二電路板量測與 12 題組除錯模擬</a:t>
-            </a:r>
-          </a:p>
-          <a:p>
-            <a:pPr>
-              <a:defRPr sz="950">
+              <a:t>2. 台灣技術士技能檢定工業電子丙級術科試題二（電路板量測與 12 題組除錯模擬）</a:t>
+            </a:r>
+          </a:p>
+          <a:p>
+            <a:pPr>
+              <a:defRPr sz="850">
                 <a:solidFill>
                   <a:srgbClr val="F1F5F9"/>
                 </a:solidFill>
@@ -16432,7 +16204,7 @@
           </a:p>
           <a:p>
             <a:pPr>
-              <a:defRPr sz="950">
+              <a:defRPr sz="850">
                 <a:solidFill>
                   <a:srgbClr val="F1F5F9"/>
                 </a:solidFill>
@@ -16440,12 +16212,74 @@
               </a:defRPr>
             </a:pPr>
             <a:r>
+              <a:t>[WORKFLOW]</a:t>
+            </a:r>
+          </a:p>
+          <a:p>
+            <a:pPr>
+              <a:defRPr sz="850">
+                <a:solidFill>
+                  <a:srgbClr val="F1F5F9"/>
+                </a:solidFill>
+                <a:latin typeface="Consolas"/>
+              </a:defRPr>
+            </a:pPr>
+            <a:r>
+              <a:t>1. 深入分析三份官方資料手冊之全部規格、尺寸、公式與規範。</a:t>
+            </a:r>
+          </a:p>
+          <a:p>
+            <a:pPr>
+              <a:defRPr sz="850">
+                <a:solidFill>
+                  <a:srgbClr val="F1F5F9"/>
+                </a:solidFill>
+                <a:latin typeface="Consolas"/>
+              </a:defRPr>
+            </a:pPr>
+            <a:r>
+              <a:t>2. 模組化架構開發，所有 CSS、SVG 向量面板、波形繪圖與事件邏輯全部內嵌於單一 HTML。</a:t>
+            </a:r>
+          </a:p>
+          <a:p>
+            <a:pPr>
+              <a:defRPr sz="850">
+                <a:solidFill>
+                  <a:srgbClr val="F1F5F9"/>
+                </a:solidFill>
+                <a:latin typeface="Consolas"/>
+              </a:defRPr>
+            </a:pPr>
+            <a:r>
+              <a:t>3. 完成後於 375px、768px、1440px 測試，並執行內建自動驗收程式 window.runAutoAudit()。</a:t>
+            </a:r>
+          </a:p>
+          <a:p>
+            <a:pPr>
+              <a:defRPr sz="850">
+                <a:solidFill>
+                  <a:srgbClr val="F1F5F9"/>
+                </a:solidFill>
+                <a:latin typeface="Consolas"/>
+              </a:defRPr>
+            </a:pPr>
+          </a:p>
+          <a:p>
+            <a:pPr>
+              <a:defRPr sz="850">
+                <a:solidFill>
+                  <a:srgbClr val="F1F5F9"/>
+                </a:solidFill>
+                <a:latin typeface="Consolas"/>
+              </a:defRPr>
+            </a:pPr>
+            <a:r>
               <a:t>[MANUAL_REFERENCES]</a:t>
             </a:r>
           </a:p>
           <a:p>
             <a:pPr>
-              <a:defRPr sz="950">
+              <a:defRPr sz="850">
                 <a:solidFill>
                   <a:srgbClr val="F1F5F9"/>
                 </a:solidFill>
@@ -16453,12 +16287,12 @@
               </a:defRPr>
             </a:pPr>
             <a:r>
-              <a:t>1. GDS-2000E 手冊：垂直1-2-5序列、時基序列、2V方波過沖公式、靜態觸發鎖定。</a:t>
-            </a:r>
-          </a:p>
-          <a:p>
-            <a:pPr>
-              <a:defRPr sz="950">
+              <a:t>1. 《GW INSTEK GDS-2000E User Manual》</a:t>
+            </a:r>
+          </a:p>
+          <a:p>
+            <a:pPr>
+              <a:defRPr sz="850">
                 <a:solidFill>
                   <a:srgbClr val="F1F5F9"/>
                 </a:solidFill>
@@ -16466,12 +16300,12 @@
               </a:defRPr>
             </a:pPr>
             <a:r>
-              <a:t>2. MFG-2000 手冊：50Ω負載效應(接示波器實出2倍電壓)、 High Z為1倍。</a:t>
-            </a:r>
-          </a:p>
-          <a:p>
-            <a:pPr>
-              <a:defRPr sz="950">
+              <a:t>   - 垂直刻度：1 mV/div ～ 10 V/div（1-2-5 序列）；輸入阻抗 1 MΩ // 16 pF。</a:t>
+            </a:r>
+          </a:p>
+          <a:p>
+            <a:pPr>
+              <a:defRPr sz="850">
                 <a:solidFill>
                   <a:srgbClr val="F1F5F9"/>
                 </a:solidFill>
@@ -16479,22 +16313,25 @@
               </a:defRPr>
             </a:pPr>
             <a:r>
-              <a:t>3. 丙級試題二：正弦波 1kHz 3Vpp 50Ω、探棒1:1、DC耦合、12題組評分規準。</a:t>
-            </a:r>
-          </a:p>
-          <a:p>
-            <a:pPr>
-              <a:defRPr sz="950">
+              <a:t>   - 水平時基：1 ns/div ～ 100 s/div（1-2-5 序列）；支援水平擴展置中與波形平移。</a:t>
+            </a:r>
+          </a:p>
+          <a:p>
+            <a:pPr>
+              <a:defRPr sz="850">
                 <a:solidFill>
                   <a:srgbClr val="F1F5F9"/>
                 </a:solidFill>
                 <a:latin typeface="Consolas"/>
               </a:defRPr>
             </a:pPr>
-          </a:p>
-          <a:p>
-            <a:pPr>
-              <a:defRPr sz="950">
+            <a:r>
+              <a:t>   - 探棒校驗端子：2 Vpp、1 kHz 正方波；邊緣暫態過沖模型：ΔV(t) = c × 0.8 × exp(-t / 40 µs)。</a:t>
+            </a:r>
+          </a:p>
+          <a:p>
+            <a:pPr>
+              <a:defRPr sz="850">
                 <a:solidFill>
                   <a:srgbClr val="F1F5F9"/>
                 </a:solidFill>
@@ -16502,12 +16339,12 @@
               </a:defRPr>
             </a:pPr>
             <a:r>
-              <a:t>[HARD_CONSTRAINTS]</a:t>
-            </a:r>
-          </a:p>
-          <a:p>
-            <a:pPr>
-              <a:defRPr sz="950">
+              <a:t>   - 螢幕規格：800×536 解析度，10 格 × 8 格格線，上方狀態列，下方資訊列。</a:t>
+            </a:r>
+          </a:p>
+          <a:p>
+            <a:pPr>
+              <a:defRPr sz="850">
                 <a:solidFill>
                   <a:srgbClr val="F1F5F9"/>
                 </a:solidFill>
@@ -16515,12 +16352,12 @@
               </a:defRPr>
             </a:pPr>
             <a:r>
-              <a:t>- 輸出單檔 instrument.html (純內嵌 CSS/SVG/JS，無外部CDN與字型)。</a:t>
-            </a:r>
-          </a:p>
-          <a:p>
-            <a:pPr>
-              <a:defRPr sz="950">
+              <a:t>2. 《GW INSTEK MFG-2000 User Manual》</a:t>
+            </a:r>
+          </a:p>
+          <a:p>
+            <a:pPr>
+              <a:defRPr sz="850">
                 <a:solidFill>
                   <a:srgbClr val="F1F5F9"/>
                 </a:solidFill>
@@ -16528,12 +16365,12 @@
               </a:defRPr>
             </a:pPr>
             <a:r>
-              <a:t>- 頂部提供【🔌 一鍵測試：信號產生器 ➔ 示波器 CH1】快捷操作。</a:t>
-            </a:r>
-          </a:p>
-          <a:p>
-            <a:pPr>
-              <a:defRPr sz="950">
+              <a:t>   - 輸出端阻抗：50 Ω；最大輸出頻率 10 MHz。</a:t>
+            </a:r>
+          </a:p>
+          <a:p>
+            <a:pPr>
+              <a:defRPr sz="850">
                 <a:solidFill>
                   <a:srgbClr val="F1F5F9"/>
                 </a:solidFill>
@@ -16541,12 +16378,12 @@
               </a:defRPr>
             </a:pPr>
             <a:r>
-              <a:t>- 靜態觸發鎖定：Trig'd 時鎖定正向過零相位，波形完全靜止清晰。</a:t>
-            </a:r>
-          </a:p>
-          <a:p>
-            <a:pPr>
-              <a:defRPr sz="950">
+              <a:t>   - 負載效應物理模型：MFG 標稱電壓以外接 50 Ω 為準。負載設 50 Ω 接示波器(1 MΩ)時，產生 2 倍端電壓效應(設 3Vpp 實出 6Vpp)；設 High Z 時為 1 倍(實出 3Vpp)。</a:t>
+            </a:r>
+          </a:p>
+          <a:p>
+            <a:pPr>
+              <a:defRPr sz="850">
                 <a:solidFill>
                   <a:srgbClr val="F1F5F9"/>
                 </a:solidFill>
@@ -16554,12 +16391,12 @@
               </a:defRPr>
             </a:pPr>
             <a:r>
-              <a:t>- 雙指引卡 10 步驟全自動播放教學引擎 (3.5s/步 連動實機按鈕)。</a:t>
-            </a:r>
-          </a:p>
-          <a:p>
-            <a:pPr>
-              <a:defRPr sz="950">
+              <a:t>   - 換算系數：正弦波 Vpp = 2√2 Vrms；方波 Vpp = 2 Vrms；三角波 Vpp = 2√3 Vrms。</a:t>
+            </a:r>
+          </a:p>
+          <a:p>
+            <a:pPr>
+              <a:defRPr sz="850">
                 <a:solidFill>
                   <a:srgbClr val="F1F5F9"/>
                 </a:solidFill>
@@ -16567,7 +16404,46 @@
               </a:defRPr>
             </a:pPr>
             <a:r>
-              <a:t>- 提供 window.runAutoAudit() 實施 10 項標準自動化檢驗。</a:t>
+              <a:t>3. 《工業電子丙級技術士技能檢定術科試題二（編號：02800-960302）》</a:t>
+            </a:r>
+          </a:p>
+          <a:p>
+            <a:pPr>
+              <a:defRPr sz="850">
+                <a:solidFill>
+                  <a:srgbClr val="F1F5F9"/>
+                </a:solidFill>
+                <a:latin typeface="Consolas"/>
+              </a:defRPr>
+            </a:pPr>
+            <a:r>
+              <a:t>   - 訊號輸入設定：信號產生器設正弦波、頻率 1 kHz、振幅 3.000 Vpp、負載 50 Ω。</a:t>
+            </a:r>
+          </a:p>
+          <a:p>
+            <a:pPr>
+              <a:defRPr sz="850">
+                <a:solidFill>
+                  <a:srgbClr val="F1F5F9"/>
+                </a:solidFill>
+                <a:latin typeface="Consolas"/>
+              </a:defRPr>
+            </a:pPr>
+            <a:r>
+              <a:t>   - 示波器設定規範：探棒開關置於 1:1，通道耦合 DC，基準線置於垂直中央。</a:t>
+            </a:r>
+          </a:p>
+          <a:p>
+            <a:pPr>
+              <a:defRPr sz="850">
+                <a:solidFill>
+                  <a:srgbClr val="F1F5F9"/>
+                </a:solidFill>
+                <a:latin typeface="Consolas"/>
+              </a:defRPr>
+            </a:pPr>
+            <a:r>
+              <a:t>   - 評分規準：12 題組各點交流峰對峰值理論電壓比對（容許誤差 ±10%）、探棒非 1:1 扣 10 分、零位偏離 &gt;0.5 格扣 5 分。</a:t>
             </a:r>
           </a:p>
         </p:txBody>
@@ -16789,7 +16665,613 @@
               </a:defRPr>
             </a:pPr>
             <a:r>
-              <a:t>第 27 / 27 頁</a:t>
+              <a:t>第 27 / 28 頁</a:t>
+            </a:r>
+          </a:p>
+        </p:txBody>
+      </p:sp>
+      <p:sp>
+        <p:nvSpPr>
+          <p:cNvPr id="7" name="TextBox 6"/>
+          <p:cNvSpPr txBox="1"/>
+          <p:nvPr/>
+        </p:nvSpPr>
+        <p:spPr>
+          <a:xfrm>
+            <a:off x="731520" y="658368"/>
+            <a:ext cx="10698480" cy="685800"/>
+          </a:xfrm>
+          <a:prstGeom prst="rect">
+            <a:avLst/>
+          </a:prstGeom>
+          <a:noFill/>
+        </p:spPr>
+        <p:txBody>
+          <a:bodyPr wrap="square" lIns="0" tIns="0" rIns="0" bIns="0">
+            <a:spAutoFit/>
+          </a:bodyPr>
+          <a:lstStyle/>
+          <a:p>
+            <a:pPr>
+              <a:defRPr sz="2800" b="1">
+                <a:solidFill>
+                  <a:srgbClr val="1F4435"/>
+                </a:solidFill>
+                <a:latin typeface="微軟正黑體"/>
+              </a:defRPr>
+            </a:pPr>
+            <a:r>
+              <a:t>📌【完整提示語 Master Prompt (下篇)】硬性約束、引擎演算法與驗收清單</a:t>
+            </a:r>
+          </a:p>
+        </p:txBody>
+      </p:sp>
+      <p:sp>
+        <p:nvSpPr>
+          <p:cNvPr id="8" name="Rounded Rectangle 7"/>
+          <p:cNvSpPr/>
+          <p:nvPr/>
+        </p:nvSpPr>
+        <p:spPr>
+          <a:xfrm>
+            <a:off x="731520" y="1508760"/>
+            <a:ext cx="10698480" cy="4846320"/>
+          </a:xfrm>
+          <a:prstGeom prst="roundRect">
+            <a:avLst/>
+          </a:prstGeom>
+          <a:solidFill>
+            <a:srgbClr val="0F172A"/>
+          </a:solidFill>
+          <a:ln w="19050">
+            <a:solidFill>
+              <a:srgbClr val="E09F3E"/>
+            </a:solidFill>
+          </a:ln>
+        </p:spPr>
+        <p:style>
+          <a:lnRef idx="1">
+            <a:schemeClr val="accent1"/>
+          </a:lnRef>
+          <a:fillRef idx="3">
+            <a:schemeClr val="accent1"/>
+          </a:fillRef>
+          <a:effectRef idx="2">
+            <a:schemeClr val="accent1"/>
+          </a:effectRef>
+          <a:fontRef idx="minor">
+            <a:schemeClr val="lt1"/>
+          </a:fontRef>
+        </p:style>
+        <p:txBody>
+          <a:bodyPr rtlCol="0" anchor="ctr"/>
+          <a:lstStyle/>
+          <a:p>
+            <a:pPr algn="ctr"/>
+          </a:p>
+        </p:txBody>
+      </p:sp>
+      <p:sp>
+        <p:nvSpPr>
+          <p:cNvPr id="9" name="TextBox 8"/>
+          <p:cNvSpPr txBox="1"/>
+          <p:nvPr/>
+        </p:nvSpPr>
+        <p:spPr>
+          <a:xfrm>
+            <a:off x="960120" y="1645920"/>
+            <a:ext cx="10241280" cy="4572000"/>
+          </a:xfrm>
+          <a:prstGeom prst="rect">
+            <a:avLst/>
+          </a:prstGeom>
+          <a:noFill/>
+        </p:spPr>
+        <p:txBody>
+          <a:bodyPr wrap="square">
+            <a:spAutoFit/>
+          </a:bodyPr>
+          <a:lstStyle/>
+          <a:p>
+            <a:pPr>
+              <a:spcAft>
+                <a:spcPts val="600"/>
+              </a:spcAft>
+              <a:defRPr sz="1200" b="1">
+                <a:solidFill>
+                  <a:srgbClr val="E09F3E"/>
+                </a:solidFill>
+                <a:latin typeface="Consolas"/>
+              </a:defRPr>
+            </a:pPr>
+            <a:r>
+              <a:t>💻 完整提示語代碼塊（後半段：約束規範、靜態鎖定模型、雙指引排程與 10 項自動驗收）</a:t>
+            </a:r>
+          </a:p>
+          <a:p>
+            <a:pPr>
+              <a:defRPr sz="850">
+                <a:solidFill>
+                  <a:srgbClr val="F1F5F9"/>
+                </a:solidFill>
+                <a:latin typeface="Consolas"/>
+              </a:defRPr>
+            </a:pPr>
+            <a:r>
+              <a:t>[HARD_CONSTRAINTS]</a:t>
+            </a:r>
+          </a:p>
+          <a:p>
+            <a:pPr>
+              <a:defRPr sz="850">
+                <a:solidFill>
+                  <a:srgbClr val="F1F5F9"/>
+                </a:solidFill>
+                <a:latin typeface="Consolas"/>
+              </a:defRPr>
+            </a:pPr>
+            <a:r>
+              <a:t>- 輸出單一獨立檔案：instrument.html（純內嵌 CSS、SVG 與 JS，無外部字型或圖檔，完全離線可用）。</a:t>
+            </a:r>
+          </a:p>
+          <a:p>
+            <a:pPr>
+              <a:defRPr sz="850">
+                <a:solidFill>
+                  <a:srgbClr val="F1F5F9"/>
+                </a:solidFill>
+                <a:latin typeface="Consolas"/>
+              </a:defRPr>
+            </a:pPr>
+            <a:r>
+              <a:t>- 繁體中文介面：全站採用台灣專業電子術語（探棒、觸發、時基、耦合、準位、峰對峰值）。</a:t>
+            </a:r>
+          </a:p>
+          <a:p>
+            <a:pPr>
+              <a:defRPr sz="850">
+                <a:solidFill>
+                  <a:srgbClr val="F1F5F9"/>
+                </a:solidFill>
+                <a:latin typeface="Consolas"/>
+              </a:defRPr>
+            </a:pPr>
+            <a:r>
+              <a:t>- 頂部提供【🔌 一鍵測試：信號產生器 ➔ 示波器 CH1】快捷操作，自動接線、開輸出並 Autoset 展開最佳波形。</a:t>
+            </a:r>
+          </a:p>
+          <a:p>
+            <a:pPr>
+              <a:defRPr sz="850">
+                <a:solidFill>
+                  <a:srgbClr val="F1F5F9"/>
+                </a:solidFill>
+                <a:latin typeface="Consolas"/>
+              </a:defRPr>
+            </a:pPr>
+            <a:r>
+              <a:t>- 觸控標靶高度寬度 ≥40px，符合 WCAG AA；手機寬度 375px 頁面無水平捲動。</a:t>
+            </a:r>
+          </a:p>
+          <a:p>
+            <a:pPr>
+              <a:defRPr sz="850">
+                <a:solidFill>
+                  <a:srgbClr val="F1F5F9"/>
+                </a:solidFill>
+                <a:latin typeface="Consolas"/>
+              </a:defRPr>
+            </a:pPr>
+          </a:p>
+          <a:p>
+            <a:pPr>
+              <a:defRPr sz="850">
+                <a:solidFill>
+                  <a:srgbClr val="F1F5F9"/>
+                </a:solidFill>
+                <a:latin typeface="Consolas"/>
+              </a:defRPr>
+            </a:pPr>
+            <a:r>
+              <a:t>[OSCILLOSCOPE_ENGINE_SPEC]</a:t>
+            </a:r>
+          </a:p>
+          <a:p>
+            <a:pPr>
+              <a:defRPr sz="850">
+                <a:solidFill>
+                  <a:srgbClr val="F1F5F9"/>
+                </a:solidFill>
+                <a:latin typeface="Consolas"/>
+              </a:defRPr>
+            </a:pPr>
+            <a:r>
+              <a:t>- 【靜態觸發相位鎖定（Stationary Trigger Lock）】：更新為 Trig'd 綠燈時，時間基準精確鎖定正向過零相位：</a:t>
+            </a:r>
+          </a:p>
+          <a:p>
+            <a:pPr>
+              <a:defRPr sz="850">
+                <a:solidFill>
+                  <a:srgbClr val="F1F5F9"/>
+                </a:solidFill>
+                <a:latin typeface="Consolas"/>
+              </a:defRPr>
+            </a:pPr>
+            <a:r>
+              <a:t>  t_lock = arcsin((Vtrig - Vavg) / (Vpp / 2)) / (2*pi*f)，波形完全靜止清晰；未觸發(Auto)時才水平漂移。</a:t>
+            </a:r>
+          </a:p>
+          <a:p>
+            <a:pPr>
+              <a:defRPr sz="850">
+                <a:solidFill>
+                  <a:srgbClr val="F1F5F9"/>
+                </a:solidFill>
+                <a:latin typeface="Consolas"/>
+              </a:defRPr>
+            </a:pPr>
+            <a:r>
+              <a:t>- Measure 量測視窗加大至 280×92px，採用 bold 18px 等寬字體、螢光黃高清晰顯示 CH1 Vpp 與 Freq。</a:t>
+            </a:r>
+          </a:p>
+          <a:p>
+            <a:pPr>
+              <a:defRPr sz="850">
+                <a:solidFill>
+                  <a:srgbClr val="F1F5F9"/>
+                </a:solidFill>
+                <a:latin typeface="Consolas"/>
+              </a:defRPr>
+            </a:pPr>
+            <a:r>
+              <a:t>- Autoset：波形垂直高度自動限制在 3～6.5 格內，時基展開 2～4 個週期，準位中置。</a:t>
+            </a:r>
+          </a:p>
+          <a:p>
+            <a:pPr>
+              <a:defRPr sz="850">
+                <a:solidFill>
+                  <a:srgbClr val="F1F5F9"/>
+                </a:solidFill>
+                <a:latin typeface="Consolas"/>
+              </a:defRPr>
+            </a:pPr>
+          </a:p>
+          <a:p>
+            <a:pPr>
+              <a:defRPr sz="850">
+                <a:solidFill>
+                  <a:srgbClr val="F1F5F9"/>
+                </a:solidFill>
+                <a:latin typeface="Consolas"/>
+              </a:defRPr>
+            </a:pPr>
+            <a:r>
+              <a:t>[GUIDE_ENGINE_SPEC]</a:t>
+            </a:r>
+          </a:p>
+          <a:p>
+            <a:pPr>
+              <a:defRPr sz="850">
+                <a:solidFill>
+                  <a:srgbClr val="F1F5F9"/>
+                </a:solidFill>
+                <a:latin typeface="Consolas"/>
+              </a:defRPr>
+            </a:pPr>
+            <a:r>
+              <a:t>- 示波器與信號產生器各配置一組 10 步驟教學指引卡，內建高可靠自動播放計時器（每 3.5 秒自動推進一步）。</a:t>
+            </a:r>
+          </a:p>
+          <a:p>
+            <a:pPr>
+              <a:defRPr sz="850">
+                <a:solidFill>
+                  <a:srgbClr val="F1F5F9"/>
+                </a:solidFill>
+                <a:latin typeface="Consolas"/>
+              </a:defRPr>
+            </a:pPr>
+            <a:r>
+              <a:t>- 自動連動硬體動作：步驟推進時自動調用硬體 API（如 Default、接線、Probe 10X、Autoset），實機按鈕持續橘光跳動高亮。</a:t>
+            </a:r>
+          </a:p>
+          <a:p>
+            <a:pPr>
+              <a:defRPr sz="850">
+                <a:solidFill>
+                  <a:srgbClr val="F1F5F9"/>
+                </a:solidFill>
+                <a:latin typeface="Consolas"/>
+              </a:defRPr>
+            </a:pPr>
+          </a:p>
+          <a:p>
+            <a:pPr>
+              <a:defRPr sz="850">
+                <a:solidFill>
+                  <a:srgbClr val="F1F5F9"/>
+                </a:solidFill>
+                <a:latin typeface="Consolas"/>
+              </a:defRPr>
+            </a:pPr>
+            <a:r>
+              <a:t>[ACCEPTANCE_CRITERIA]</a:t>
+            </a:r>
+          </a:p>
+          <a:p>
+            <a:pPr>
+              <a:defRPr sz="850">
+                <a:solidFill>
+                  <a:srgbClr val="F1F5F9"/>
+                </a:solidFill>
+                <a:latin typeface="Consolas"/>
+              </a:defRPr>
+            </a:pPr>
+            <a:r>
+              <a:t>提供主控台自動化驗收腳本 window.runAutoAudit()，必須自動檢驗並通過以下 10 項標準：</a:t>
+            </a:r>
+          </a:p>
+          <a:p>
+            <a:pPr>
+              <a:defRPr sz="850">
+                <a:solidFill>
+                  <a:srgbClr val="F1F5F9"/>
+                </a:solidFill>
+                <a:latin typeface="Consolas"/>
+              </a:defRPr>
+            </a:pPr>
+            <a:r>
+              <a:t>1. 離線單檔無外部依賴  2. 探棒補償尖角/圓角/良好判定  3. 50Ω負載2倍/HiZ1倍效應  4. Autoset波形3~6.5格</a:t>
+            </a:r>
+          </a:p>
+          <a:p>
+            <a:pPr>
+              <a:defRPr sz="850">
+                <a:solidFill>
+                  <a:srgbClr val="F1F5F9"/>
+                </a:solidFill>
+                <a:latin typeface="Consolas"/>
+              </a:defRPr>
+            </a:pPr>
+            <a:r>
+              <a:t>5. 觸發準位內Trig'd穩定、超出Auto漂移  6. 丙級12題組數據完備  7. 觸控尺寸≥40px  8. 探棒開關與讀數換算</a:t>
+            </a:r>
+          </a:p>
+          <a:p>
+            <a:pPr>
+              <a:defRPr sz="850">
+                <a:solidFill>
+                  <a:srgbClr val="F1F5F9"/>
+                </a:solidFill>
+                <a:latin typeface="Consolas"/>
+              </a:defRPr>
+            </a:pPr>
+            <a:r>
+              <a:t>9. 雙指引卡10步自動播放引擎  10. Measure讀數bold 18px高清晰度。</a:t>
+            </a:r>
+          </a:p>
+        </p:txBody>
+      </p:sp>
+    </p:spTree>
+  </p:cSld>
+  <p:clrMapOvr>
+    <a:masterClrMapping/>
+  </p:clrMapOvr>
+  <p:transition spd="med">
+    <p:fade/>
+  </p:transition>
+</p:sld>
+</file>
+
+<file path=ppt/slides/slide28.xml><?xml version="1.0" encoding="utf-8"?>
+<p:sld xmlns:a="http://schemas.openxmlformats.org/drawingml/2006/main" xmlns:p="http://schemas.openxmlformats.org/presentationml/2006/main" xmlns:r="http://schemas.openxmlformats.org/officeDocument/2006/relationships">
+  <p:cSld>
+    <p:spTree>
+      <p:nvGrpSpPr>
+        <p:cNvPr id="1" name=""/>
+        <p:cNvGrpSpPr/>
+        <p:nvPr/>
+      </p:nvGrpSpPr>
+      <p:grpSpPr/>
+      <p:sp>
+        <p:nvSpPr>
+          <p:cNvPr id="2" name="Rectangle 1"/>
+          <p:cNvSpPr/>
+          <p:nvPr/>
+        </p:nvSpPr>
+        <p:spPr>
+          <a:xfrm>
+            <a:off x="0" y="0"/>
+            <a:ext cx="12191695" cy="6858000"/>
+          </a:xfrm>
+          <a:prstGeom prst="rect">
+            <a:avLst/>
+          </a:prstGeom>
+          <a:solidFill>
+            <a:srgbClr val="FAF7F2"/>
+          </a:solidFill>
+          <a:ln>
+            <a:noFill/>
+          </a:ln>
+        </p:spPr>
+        <p:style>
+          <a:lnRef idx="1">
+            <a:schemeClr val="accent1"/>
+          </a:lnRef>
+          <a:fillRef idx="3">
+            <a:schemeClr val="accent1"/>
+          </a:fillRef>
+          <a:effectRef idx="2">
+            <a:schemeClr val="accent1"/>
+          </a:effectRef>
+          <a:fontRef idx="minor">
+            <a:schemeClr val="lt1"/>
+          </a:fontRef>
+        </p:style>
+        <p:txBody>
+          <a:bodyPr rtlCol="0" anchor="ctr"/>
+          <a:lstStyle/>
+          <a:p>
+            <a:pPr algn="ctr"/>
+          </a:p>
+        </p:txBody>
+      </p:sp>
+      <p:sp>
+        <p:nvSpPr>
+          <p:cNvPr id="3" name="Rectangle 2"/>
+          <p:cNvSpPr/>
+          <p:nvPr/>
+        </p:nvSpPr>
+        <p:spPr>
+          <a:xfrm>
+            <a:off x="0" y="0"/>
+            <a:ext cx="12191695" cy="109728"/>
+          </a:xfrm>
+          <a:prstGeom prst="rect">
+            <a:avLst/>
+          </a:prstGeom>
+          <a:solidFill>
+            <a:srgbClr val="1F4435"/>
+          </a:solidFill>
+          <a:ln>
+            <a:noFill/>
+          </a:ln>
+        </p:spPr>
+        <p:style>
+          <a:lnRef idx="1">
+            <a:schemeClr val="accent1"/>
+          </a:lnRef>
+          <a:fillRef idx="3">
+            <a:schemeClr val="accent1"/>
+          </a:fillRef>
+          <a:effectRef idx="2">
+            <a:schemeClr val="accent1"/>
+          </a:effectRef>
+          <a:fontRef idx="minor">
+            <a:schemeClr val="lt1"/>
+          </a:fontRef>
+        </p:style>
+        <p:txBody>
+          <a:bodyPr rtlCol="0" anchor="ctr"/>
+          <a:lstStyle/>
+          <a:p>
+            <a:pPr algn="ctr"/>
+          </a:p>
+        </p:txBody>
+      </p:sp>
+      <p:sp>
+        <p:nvSpPr>
+          <p:cNvPr id="4" name="Rectangle 3"/>
+          <p:cNvSpPr/>
+          <p:nvPr/>
+        </p:nvSpPr>
+        <p:spPr>
+          <a:xfrm>
+            <a:off x="0" y="109728"/>
+            <a:ext cx="4114800" cy="36576"/>
+          </a:xfrm>
+          <a:prstGeom prst="rect">
+            <a:avLst/>
+          </a:prstGeom>
+          <a:solidFill>
+            <a:srgbClr val="C25E2E"/>
+          </a:solidFill>
+          <a:ln>
+            <a:noFill/>
+          </a:ln>
+        </p:spPr>
+        <p:style>
+          <a:lnRef idx="1">
+            <a:schemeClr val="accent1"/>
+          </a:lnRef>
+          <a:fillRef idx="3">
+            <a:schemeClr val="accent1"/>
+          </a:fillRef>
+          <a:effectRef idx="2">
+            <a:schemeClr val="accent1"/>
+          </a:effectRef>
+          <a:fontRef idx="minor">
+            <a:schemeClr val="lt1"/>
+          </a:fontRef>
+        </p:style>
+        <p:txBody>
+          <a:bodyPr rtlCol="0" anchor="ctr"/>
+          <a:lstStyle/>
+          <a:p>
+            <a:pPr algn="ctr"/>
+          </a:p>
+        </p:txBody>
+      </p:sp>
+      <p:sp>
+        <p:nvSpPr>
+          <p:cNvPr id="5" name="TextBox 4"/>
+          <p:cNvSpPr txBox="1"/>
+          <p:nvPr/>
+        </p:nvSpPr>
+        <p:spPr>
+          <a:xfrm>
+            <a:off x="731520" y="320040"/>
+            <a:ext cx="7772400" cy="320040"/>
+          </a:xfrm>
+          <a:prstGeom prst="rect">
+            <a:avLst/>
+          </a:prstGeom>
+          <a:noFill/>
+        </p:spPr>
+        <p:txBody>
+          <a:bodyPr wrap="none" lIns="0" tIns="0" rIns="0" bIns="0">
+            <a:spAutoFit/>
+          </a:bodyPr>
+          <a:lstStyle/>
+          <a:p>
+            <a:pPr>
+              <a:defRPr sz="1300" b="1">
+                <a:solidFill>
+                  <a:srgbClr val="C25E2E"/>
+                </a:solidFill>
+                <a:latin typeface="微軟正黑體"/>
+              </a:defRPr>
+            </a:pPr>
+            <a:r>
+              <a:t>🌿 ANTIGRAVITY 研習手冊  |  第七單元：高階實戰特輯</a:t>
+            </a:r>
+          </a:p>
+        </p:txBody>
+      </p:sp>
+      <p:sp>
+        <p:nvSpPr>
+          <p:cNvPr id="6" name="TextBox 5"/>
+          <p:cNvSpPr txBox="1"/>
+          <p:nvPr/>
+        </p:nvSpPr>
+        <p:spPr>
+          <a:xfrm>
+            <a:off x="9326880" y="320040"/>
+            <a:ext cx="2103120" cy="320040"/>
+          </a:xfrm>
+          <a:prstGeom prst="rect">
+            <a:avLst/>
+          </a:prstGeom>
+          <a:noFill/>
+        </p:spPr>
+        <p:txBody>
+          <a:bodyPr wrap="none" lIns="0" tIns="0" rIns="0" bIns="0">
+            <a:spAutoFit/>
+          </a:bodyPr>
+          <a:lstStyle/>
+          <a:p>
+            <a:pPr algn="r">
+              <a:defRPr sz="1300">
+                <a:solidFill>
+                  <a:srgbClr val="6C757D"/>
+                </a:solidFill>
+                <a:latin typeface="微軟正黑體"/>
+              </a:defRPr>
+            </a:pPr>
+            <a:r>
+              <a:t>第 28 / 28 頁</a:t>
             </a:r>
           </a:p>
         </p:txBody>
